--- a/TrashOut – Проект Константина Евстигнеева.pptx
+++ b/TrashOut – Проект Константина Евстигнеева.pptx
@@ -6,13 +6,14 @@
   </p:sldMasterIdLst>
   <p:sldIdLst>
     <p:sldId id="256" r:id="rId2"/>
-    <p:sldId id="257" r:id="rId3"/>
-    <p:sldId id="258" r:id="rId4"/>
-    <p:sldId id="259" r:id="rId5"/>
-    <p:sldId id="263" r:id="rId6"/>
-    <p:sldId id="264" r:id="rId7"/>
-    <p:sldId id="262" r:id="rId8"/>
-    <p:sldId id="261" r:id="rId9"/>
+    <p:sldId id="265" r:id="rId3"/>
+    <p:sldId id="257" r:id="rId4"/>
+    <p:sldId id="258" r:id="rId5"/>
+    <p:sldId id="259" r:id="rId6"/>
+    <p:sldId id="263" r:id="rId7"/>
+    <p:sldId id="264" r:id="rId8"/>
+    <p:sldId id="262" r:id="rId9"/>
+    <p:sldId id="261" r:id="rId10"/>
   </p:sldIdLst>
   <p:sldSz cx="12192000" cy="6858000"/>
   <p:notesSz cx="6858000" cy="9144000"/>
@@ -119,6 +120,790 @@
 </p:presentation>
 </file>
 
+<file path=ppt/charts/chart1.xml><?xml version="1.0" encoding="utf-8"?>
+<c:chartSpace xmlns:c="http://schemas.openxmlformats.org/drawingml/2006/chart" xmlns:a="http://schemas.openxmlformats.org/drawingml/2006/main" xmlns:r="http://schemas.openxmlformats.org/officeDocument/2006/relationships" xmlns:c16r2="http://schemas.microsoft.com/office/drawing/2015/06/chart">
+  <c:date1904 val="0"/>
+  <c:lang val="ru-RU"/>
+  <c:roundedCorners val="0"/>
+  <mc:AlternateContent xmlns:mc="http://schemas.openxmlformats.org/markup-compatibility/2006">
+    <mc:Choice xmlns:c14="http://schemas.microsoft.com/office/drawing/2007/8/2/chart" Requires="c14">
+      <c14:style val="102"/>
+    </mc:Choice>
+    <mc:Fallback>
+      <c:style val="2"/>
+    </mc:Fallback>
+  </mc:AlternateContent>
+  <c:chart>
+    <c:title>
+      <c:overlay val="0"/>
+      <c:spPr>
+        <a:noFill/>
+        <a:ln>
+          <a:noFill/>
+        </a:ln>
+        <a:effectLst/>
+      </c:spPr>
+      <c:txPr>
+        <a:bodyPr rot="0" spcFirstLastPara="1" vertOverflow="ellipsis" vert="horz" wrap="square" anchor="ctr" anchorCtr="1"/>
+        <a:lstStyle/>
+        <a:p>
+          <a:pPr>
+            <a:defRPr sz="1862" b="0" i="0" u="none" strike="noStrike" kern="1200" spc="0" baseline="0">
+              <a:solidFill>
+                <a:schemeClr val="tx1">
+                  <a:lumMod val="65000"/>
+                  <a:lumOff val="35000"/>
+                </a:schemeClr>
+              </a:solidFill>
+              <a:latin typeface="+mn-lt"/>
+              <a:ea typeface="+mn-ea"/>
+              <a:cs typeface="+mn-cs"/>
+            </a:defRPr>
+          </a:pPr>
+          <a:endParaRPr lang="ru-RU"/>
+        </a:p>
+      </c:txPr>
+    </c:title>
+    <c:autoTitleDeleted val="0"/>
+    <c:plotArea>
+      <c:layout/>
+      <c:pieChart>
+        <c:varyColors val="1"/>
+        <c:ser>
+          <c:idx val="0"/>
+          <c:order val="0"/>
+          <c:tx>
+            <c:strRef>
+              <c:f>Лист1!$B$1</c:f>
+              <c:strCache>
+                <c:ptCount val="1"/>
+                <c:pt idx="0">
+                  <c:v>Затраты</c:v>
+                </c:pt>
+              </c:strCache>
+            </c:strRef>
+          </c:tx>
+          <c:dPt>
+            <c:idx val="0"/>
+            <c:bubble3D val="0"/>
+            <c:spPr>
+              <a:solidFill>
+                <a:schemeClr val="accent1"/>
+              </a:solidFill>
+              <a:ln w="19050">
+                <a:solidFill>
+                  <a:schemeClr val="lt1"/>
+                </a:solidFill>
+              </a:ln>
+              <a:effectLst/>
+            </c:spPr>
+            <c:extLst>
+              <c:ext xmlns:c16="http://schemas.microsoft.com/office/drawing/2014/chart" uri="{C3380CC4-5D6E-409C-BE32-E72D297353CC}">
+                <c16:uniqueId val="{00000001-5AF5-42C0-9653-EA05A41D5A60}"/>
+              </c:ext>
+            </c:extLst>
+          </c:dPt>
+          <c:dPt>
+            <c:idx val="1"/>
+            <c:bubble3D val="0"/>
+            <c:spPr>
+              <a:solidFill>
+                <a:schemeClr val="tx2">
+                  <a:lumMod val="50000"/>
+                  <a:lumOff val="50000"/>
+                </a:schemeClr>
+              </a:solidFill>
+              <a:ln w="19050">
+                <a:solidFill>
+                  <a:schemeClr val="lt1"/>
+                </a:solidFill>
+              </a:ln>
+              <a:effectLst/>
+            </c:spPr>
+            <c:extLst>
+              <c:ext xmlns:c16="http://schemas.microsoft.com/office/drawing/2014/chart" uri="{C3380CC4-5D6E-409C-BE32-E72D297353CC}">
+                <c16:uniqueId val="{00000001-733A-452E-917C-4E53B5DE113C}"/>
+              </c:ext>
+            </c:extLst>
+          </c:dPt>
+          <c:cat>
+            <c:strRef>
+              <c:f>Лист1!$A$2:$A$3</c:f>
+              <c:strCache>
+                <c:ptCount val="2"/>
+                <c:pt idx="0">
+                  <c:v>Telegram-бот (хостинг + БД)</c:v>
+                </c:pt>
+                <c:pt idx="1">
+                  <c:v>Аренда облачного сервера (Кемерово)</c:v>
+                </c:pt>
+              </c:strCache>
+            </c:strRef>
+          </c:cat>
+          <c:val>
+            <c:numRef>
+              <c:f>Лист1!$B$2:$B$3</c:f>
+              <c:numCache>
+                <c:formatCode>General</c:formatCode>
+                <c:ptCount val="2"/>
+                <c:pt idx="0">
+                  <c:v>2500</c:v>
+                </c:pt>
+                <c:pt idx="1">
+                  <c:v>1000</c:v>
+                </c:pt>
+              </c:numCache>
+            </c:numRef>
+          </c:val>
+          <c:extLst>
+            <c:ext xmlns:c16="http://schemas.microsoft.com/office/drawing/2014/chart" uri="{C3380CC4-5D6E-409C-BE32-E72D297353CC}">
+              <c16:uniqueId val="{00000000-733A-452E-917C-4E53B5DE113C}"/>
+            </c:ext>
+          </c:extLst>
+        </c:ser>
+        <c:dLbls>
+          <c:showLegendKey val="0"/>
+          <c:showVal val="0"/>
+          <c:showCatName val="0"/>
+          <c:showSerName val="0"/>
+          <c:showPercent val="0"/>
+          <c:showBubbleSize val="0"/>
+          <c:showLeaderLines val="1"/>
+        </c:dLbls>
+        <c:firstSliceAng val="0"/>
+      </c:pieChart>
+      <c:spPr>
+        <a:noFill/>
+        <a:ln>
+          <a:noFill/>
+        </a:ln>
+        <a:effectLst/>
+      </c:spPr>
+    </c:plotArea>
+    <c:legend>
+      <c:legendPos val="b"/>
+      <c:overlay val="0"/>
+      <c:spPr>
+        <a:noFill/>
+        <a:ln>
+          <a:noFill/>
+        </a:ln>
+        <a:effectLst/>
+      </c:spPr>
+      <c:txPr>
+        <a:bodyPr rot="0" spcFirstLastPara="1" vertOverflow="ellipsis" vert="horz" wrap="square" anchor="ctr" anchorCtr="1"/>
+        <a:lstStyle/>
+        <a:p>
+          <a:pPr>
+            <a:defRPr sz="1197" b="0" i="0" u="none" strike="noStrike" kern="1200" baseline="0">
+              <a:solidFill>
+                <a:schemeClr val="tx1">
+                  <a:lumMod val="65000"/>
+                  <a:lumOff val="35000"/>
+                </a:schemeClr>
+              </a:solidFill>
+              <a:latin typeface="+mn-lt"/>
+              <a:ea typeface="+mn-ea"/>
+              <a:cs typeface="+mn-cs"/>
+            </a:defRPr>
+          </a:pPr>
+          <a:endParaRPr lang="ru-RU"/>
+        </a:p>
+      </c:txPr>
+    </c:legend>
+    <c:plotVisOnly val="1"/>
+    <c:dispBlanksAs val="gap"/>
+    <c:extLst>
+      <c:ext xmlns:c16r3="http://schemas.microsoft.com/office/drawing/2017/03/chart" uri="{56B9EC1D-385E-4148-901F-78D8002777C0}">
+        <c16r3:dataDisplayOptions16>
+          <c16r3:dispNaAsBlank val="1"/>
+        </c16r3:dataDisplayOptions16>
+      </c:ext>
+    </c:extLst>
+    <c:showDLblsOverMax val="0"/>
+  </c:chart>
+  <c:spPr>
+    <a:noFill/>
+    <a:ln>
+      <a:noFill/>
+    </a:ln>
+    <a:effectLst/>
+  </c:spPr>
+  <c:txPr>
+    <a:bodyPr/>
+    <a:lstStyle/>
+    <a:p>
+      <a:pPr>
+        <a:defRPr/>
+      </a:pPr>
+      <a:endParaRPr lang="ru-RU"/>
+    </a:p>
+  </c:txPr>
+  <c:externalData r:id="rId3">
+    <c:autoUpdate val="0"/>
+  </c:externalData>
+</c:chartSpace>
+</file>
+
+<file path=ppt/charts/colors1.xml><?xml version="1.0" encoding="utf-8"?>
+<cs:colorStyle xmlns:cs="http://schemas.microsoft.com/office/drawing/2012/chartStyle" xmlns:a="http://schemas.openxmlformats.org/drawingml/2006/main" meth="cycle" id="10">
+  <a:schemeClr val="accent1"/>
+  <a:schemeClr val="accent2"/>
+  <a:schemeClr val="accent3"/>
+  <a:schemeClr val="accent4"/>
+  <a:schemeClr val="accent5"/>
+  <a:schemeClr val="accent6"/>
+  <cs:variation/>
+  <cs:variation>
+    <a:lumMod val="60000"/>
+  </cs:variation>
+  <cs:variation>
+    <a:lumMod val="80000"/>
+    <a:lumOff val="20000"/>
+  </cs:variation>
+  <cs:variation>
+    <a:lumMod val="80000"/>
+  </cs:variation>
+  <cs:variation>
+    <a:lumMod val="60000"/>
+    <a:lumOff val="40000"/>
+  </cs:variation>
+  <cs:variation>
+    <a:lumMod val="50000"/>
+  </cs:variation>
+  <cs:variation>
+    <a:lumMod val="70000"/>
+    <a:lumOff val="30000"/>
+  </cs:variation>
+  <cs:variation>
+    <a:lumMod val="70000"/>
+  </cs:variation>
+  <cs:variation>
+    <a:lumMod val="50000"/>
+    <a:lumOff val="50000"/>
+  </cs:variation>
+</cs:colorStyle>
+</file>
+
+<file path=ppt/charts/style1.xml><?xml version="1.0" encoding="utf-8"?>
+<cs:chartStyle xmlns:cs="http://schemas.microsoft.com/office/drawing/2012/chartStyle" xmlns:a="http://schemas.openxmlformats.org/drawingml/2006/main" id="251">
+  <cs:axisTitle>
+    <cs:lnRef idx="0"/>
+    <cs:fillRef idx="0"/>
+    <cs:effectRef idx="0"/>
+    <cs:fontRef idx="minor">
+      <a:schemeClr val="tx1">
+        <a:lumMod val="65000"/>
+        <a:lumOff val="35000"/>
+      </a:schemeClr>
+    </cs:fontRef>
+    <cs:defRPr sz="1330" kern="1200"/>
+  </cs:axisTitle>
+  <cs:categoryAxis>
+    <cs:lnRef idx="0"/>
+    <cs:fillRef idx="0"/>
+    <cs:effectRef idx="0"/>
+    <cs:fontRef idx="minor">
+      <a:schemeClr val="tx1">
+        <a:lumMod val="65000"/>
+        <a:lumOff val="35000"/>
+      </a:schemeClr>
+    </cs:fontRef>
+    <cs:spPr>
+      <a:ln w="9525" cap="flat" cmpd="sng" algn="ctr">
+        <a:solidFill>
+          <a:schemeClr val="tx1">
+            <a:lumMod val="15000"/>
+            <a:lumOff val="85000"/>
+          </a:schemeClr>
+        </a:solidFill>
+        <a:round/>
+      </a:ln>
+    </cs:spPr>
+    <cs:defRPr sz="1197" kern="1200"/>
+  </cs:categoryAxis>
+  <cs:chartArea mods="allowNoFillOverride allowNoLineOverride">
+    <cs:lnRef idx="0"/>
+    <cs:fillRef idx="0"/>
+    <cs:effectRef idx="0"/>
+    <cs:fontRef idx="minor">
+      <a:schemeClr val="tx1"/>
+    </cs:fontRef>
+    <cs:spPr>
+      <a:solidFill>
+        <a:schemeClr val="bg1"/>
+      </a:solidFill>
+      <a:ln w="9525" cap="flat" cmpd="sng" algn="ctr">
+        <a:solidFill>
+          <a:schemeClr val="tx1">
+            <a:lumMod val="15000"/>
+            <a:lumOff val="85000"/>
+          </a:schemeClr>
+        </a:solidFill>
+        <a:round/>
+      </a:ln>
+    </cs:spPr>
+    <cs:defRPr sz="1197" kern="1200"/>
+  </cs:chartArea>
+  <cs:dataLabel>
+    <cs:lnRef idx="0"/>
+    <cs:fillRef idx="0"/>
+    <cs:effectRef idx="0"/>
+    <cs:fontRef idx="minor">
+      <a:schemeClr val="tx1">
+        <a:lumMod val="75000"/>
+        <a:lumOff val="25000"/>
+      </a:schemeClr>
+    </cs:fontRef>
+    <cs:defRPr sz="1197" kern="1200"/>
+  </cs:dataLabel>
+  <cs:dataLabelCallout>
+    <cs:lnRef idx="0"/>
+    <cs:fillRef idx="0"/>
+    <cs:effectRef idx="0"/>
+    <cs:fontRef idx="minor">
+      <a:schemeClr val="dk1">
+        <a:lumMod val="65000"/>
+        <a:lumOff val="35000"/>
+      </a:schemeClr>
+    </cs:fontRef>
+    <cs:spPr>
+      <a:solidFill>
+        <a:schemeClr val="lt1"/>
+      </a:solidFill>
+      <a:ln>
+        <a:solidFill>
+          <a:schemeClr val="dk1">
+            <a:lumMod val="25000"/>
+            <a:lumOff val="75000"/>
+          </a:schemeClr>
+        </a:solidFill>
+      </a:ln>
+    </cs:spPr>
+    <cs:defRPr sz="1197" kern="1200"/>
+    <cs:bodyPr rot="0" spcFirstLastPara="1" vertOverflow="clip" horzOverflow="clip" vert="horz" wrap="square" lIns="36576" tIns="18288" rIns="36576" bIns="18288" anchor="ctr" anchorCtr="1">
+      <a:spAutoFit/>
+    </cs:bodyPr>
+  </cs:dataLabelCallout>
+  <cs:dataPoint>
+    <cs:lnRef idx="0"/>
+    <cs:fillRef idx="1">
+      <cs:styleClr val="auto"/>
+    </cs:fillRef>
+    <cs:effectRef idx="0"/>
+    <cs:fontRef idx="minor">
+      <a:schemeClr val="tx1"/>
+    </cs:fontRef>
+    <cs:spPr>
+      <a:ln w="19050">
+        <a:solidFill>
+          <a:schemeClr val="lt1"/>
+        </a:solidFill>
+      </a:ln>
+    </cs:spPr>
+  </cs:dataPoint>
+  <cs:dataPoint3D>
+    <cs:lnRef idx="0"/>
+    <cs:fillRef idx="1">
+      <cs:styleClr val="auto"/>
+    </cs:fillRef>
+    <cs:effectRef idx="0"/>
+    <cs:fontRef idx="minor">
+      <a:schemeClr val="tx1"/>
+    </cs:fontRef>
+    <cs:spPr>
+      <a:ln w="25400">
+        <a:solidFill>
+          <a:schemeClr val="lt1"/>
+        </a:solidFill>
+      </a:ln>
+    </cs:spPr>
+  </cs:dataPoint3D>
+  <cs:dataPointLine>
+    <cs:lnRef idx="0">
+      <cs:styleClr val="auto"/>
+    </cs:lnRef>
+    <cs:fillRef idx="0"/>
+    <cs:effectRef idx="0"/>
+    <cs:fontRef idx="minor">
+      <a:schemeClr val="tx1"/>
+    </cs:fontRef>
+    <cs:spPr>
+      <a:ln w="28575" cap="rnd">
+        <a:solidFill>
+          <a:schemeClr val="phClr"/>
+        </a:solidFill>
+        <a:round/>
+      </a:ln>
+    </cs:spPr>
+  </cs:dataPointLine>
+  <cs:dataPointMarker>
+    <cs:lnRef idx="0">
+      <cs:styleClr val="auto"/>
+    </cs:lnRef>
+    <cs:fillRef idx="1">
+      <cs:styleClr val="auto"/>
+    </cs:fillRef>
+    <cs:effectRef idx="0"/>
+    <cs:fontRef idx="minor">
+      <a:schemeClr val="tx1"/>
+    </cs:fontRef>
+    <cs:spPr>
+      <a:ln w="9525">
+        <a:solidFill>
+          <a:schemeClr val="phClr"/>
+        </a:solidFill>
+      </a:ln>
+    </cs:spPr>
+  </cs:dataPointMarker>
+  <cs:dataPointMarkerLayout symbol="circle" size="5"/>
+  <cs:dataPointWireframe>
+    <cs:lnRef idx="0">
+      <cs:styleClr val="auto"/>
+    </cs:lnRef>
+    <cs:fillRef idx="0"/>
+    <cs:effectRef idx="0"/>
+    <cs:fontRef idx="minor">
+      <a:schemeClr val="tx1"/>
+    </cs:fontRef>
+    <cs:spPr>
+      <a:ln w="9525" cap="rnd">
+        <a:solidFill>
+          <a:schemeClr val="phClr"/>
+        </a:solidFill>
+        <a:round/>
+      </a:ln>
+    </cs:spPr>
+  </cs:dataPointWireframe>
+  <cs:dataTable>
+    <cs:lnRef idx="0"/>
+    <cs:fillRef idx="0"/>
+    <cs:effectRef idx="0"/>
+    <cs:fontRef idx="minor">
+      <a:schemeClr val="tx1">
+        <a:lumMod val="65000"/>
+        <a:lumOff val="35000"/>
+      </a:schemeClr>
+    </cs:fontRef>
+    <cs:spPr>
+      <a:noFill/>
+      <a:ln w="9525" cap="flat" cmpd="sng" algn="ctr">
+        <a:solidFill>
+          <a:schemeClr val="tx1">
+            <a:lumMod val="15000"/>
+            <a:lumOff val="85000"/>
+          </a:schemeClr>
+        </a:solidFill>
+        <a:round/>
+      </a:ln>
+    </cs:spPr>
+    <cs:defRPr sz="1197" kern="1200"/>
+  </cs:dataTable>
+  <cs:downBar>
+    <cs:lnRef idx="0"/>
+    <cs:fillRef idx="0"/>
+    <cs:effectRef idx="0"/>
+    <cs:fontRef idx="minor">
+      <a:schemeClr val="tx1"/>
+    </cs:fontRef>
+    <cs:spPr>
+      <a:solidFill>
+        <a:schemeClr val="dk1">
+          <a:lumMod val="75000"/>
+          <a:lumOff val="25000"/>
+        </a:schemeClr>
+      </a:solidFill>
+      <a:ln w="9525" cap="flat" cmpd="sng" algn="ctr">
+        <a:solidFill>
+          <a:schemeClr val="tx1">
+            <a:lumMod val="65000"/>
+            <a:lumOff val="35000"/>
+          </a:schemeClr>
+        </a:solidFill>
+        <a:round/>
+      </a:ln>
+    </cs:spPr>
+  </cs:downBar>
+  <cs:dropLine>
+    <cs:lnRef idx="0"/>
+    <cs:fillRef idx="0"/>
+    <cs:effectRef idx="0"/>
+    <cs:fontRef idx="minor">
+      <a:schemeClr val="tx1"/>
+    </cs:fontRef>
+    <cs:spPr>
+      <a:ln w="9525" cap="flat" cmpd="sng" algn="ctr">
+        <a:solidFill>
+          <a:schemeClr val="tx1">
+            <a:lumMod val="35000"/>
+            <a:lumOff val="65000"/>
+          </a:schemeClr>
+        </a:solidFill>
+        <a:round/>
+      </a:ln>
+    </cs:spPr>
+  </cs:dropLine>
+  <cs:errorBar>
+    <cs:lnRef idx="0"/>
+    <cs:fillRef idx="0"/>
+    <cs:effectRef idx="0"/>
+    <cs:fontRef idx="minor">
+      <a:schemeClr val="tx1"/>
+    </cs:fontRef>
+    <cs:spPr>
+      <a:ln w="9525" cap="flat" cmpd="sng" algn="ctr">
+        <a:solidFill>
+          <a:schemeClr val="tx1">
+            <a:lumMod val="65000"/>
+            <a:lumOff val="35000"/>
+          </a:schemeClr>
+        </a:solidFill>
+        <a:round/>
+      </a:ln>
+    </cs:spPr>
+  </cs:errorBar>
+  <cs:floor>
+    <cs:lnRef idx="0"/>
+    <cs:fillRef idx="0"/>
+    <cs:effectRef idx="0"/>
+    <cs:fontRef idx="minor">
+      <a:schemeClr val="tx1"/>
+    </cs:fontRef>
+    <cs:spPr>
+      <a:noFill/>
+      <a:ln>
+        <a:noFill/>
+      </a:ln>
+    </cs:spPr>
+  </cs:floor>
+  <cs:gridlineMajor>
+    <cs:lnRef idx="0"/>
+    <cs:fillRef idx="0"/>
+    <cs:effectRef idx="0"/>
+    <cs:fontRef idx="minor">
+      <a:schemeClr val="tx1"/>
+    </cs:fontRef>
+    <cs:spPr>
+      <a:ln w="9525" cap="flat" cmpd="sng" algn="ctr">
+        <a:solidFill>
+          <a:schemeClr val="tx1">
+            <a:lumMod val="15000"/>
+            <a:lumOff val="85000"/>
+          </a:schemeClr>
+        </a:solidFill>
+        <a:round/>
+      </a:ln>
+    </cs:spPr>
+  </cs:gridlineMajor>
+  <cs:gridlineMinor>
+    <cs:lnRef idx="0"/>
+    <cs:fillRef idx="0"/>
+    <cs:effectRef idx="0"/>
+    <cs:fontRef idx="minor">
+      <a:schemeClr val="tx1"/>
+    </cs:fontRef>
+    <cs:spPr>
+      <a:ln w="9525" cap="flat" cmpd="sng" algn="ctr">
+        <a:solidFill>
+          <a:schemeClr val="tx1">
+            <a:lumMod val="5000"/>
+            <a:lumOff val="95000"/>
+          </a:schemeClr>
+        </a:solidFill>
+        <a:round/>
+      </a:ln>
+    </cs:spPr>
+  </cs:gridlineMinor>
+  <cs:hiLoLine>
+    <cs:lnRef idx="0"/>
+    <cs:fillRef idx="0"/>
+    <cs:effectRef idx="0"/>
+    <cs:fontRef idx="minor">
+      <a:schemeClr val="tx1"/>
+    </cs:fontRef>
+    <cs:spPr>
+      <a:ln w="9525" cap="flat" cmpd="sng" algn="ctr">
+        <a:solidFill>
+          <a:schemeClr val="tx1">
+            <a:lumMod val="50000"/>
+            <a:lumOff val="50000"/>
+          </a:schemeClr>
+        </a:solidFill>
+        <a:round/>
+      </a:ln>
+    </cs:spPr>
+  </cs:hiLoLine>
+  <cs:leaderLine>
+    <cs:lnRef idx="0"/>
+    <cs:fillRef idx="0"/>
+    <cs:effectRef idx="0"/>
+    <cs:fontRef idx="minor">
+      <a:schemeClr val="tx1"/>
+    </cs:fontRef>
+    <cs:spPr>
+      <a:ln w="9525" cap="flat" cmpd="sng" algn="ctr">
+        <a:solidFill>
+          <a:schemeClr val="tx1">
+            <a:lumMod val="35000"/>
+            <a:lumOff val="65000"/>
+          </a:schemeClr>
+        </a:solidFill>
+        <a:round/>
+      </a:ln>
+    </cs:spPr>
+  </cs:leaderLine>
+  <cs:legend>
+    <cs:lnRef idx="0"/>
+    <cs:fillRef idx="0"/>
+    <cs:effectRef idx="0"/>
+    <cs:fontRef idx="minor">
+      <a:schemeClr val="tx1">
+        <a:lumMod val="65000"/>
+        <a:lumOff val="35000"/>
+      </a:schemeClr>
+    </cs:fontRef>
+    <cs:defRPr sz="1197" kern="1200"/>
+  </cs:legend>
+  <cs:plotArea mods="allowNoFillOverride allowNoLineOverride">
+    <cs:lnRef idx="0"/>
+    <cs:fillRef idx="0"/>
+    <cs:effectRef idx="0"/>
+    <cs:fontRef idx="minor">
+      <a:schemeClr val="tx1"/>
+    </cs:fontRef>
+  </cs:plotArea>
+  <cs:plotArea3D mods="allowNoFillOverride allowNoLineOverride">
+    <cs:lnRef idx="0"/>
+    <cs:fillRef idx="0"/>
+    <cs:effectRef idx="0"/>
+    <cs:fontRef idx="minor">
+      <a:schemeClr val="tx1"/>
+    </cs:fontRef>
+  </cs:plotArea3D>
+  <cs:seriesAxis>
+    <cs:lnRef idx="0"/>
+    <cs:fillRef idx="0"/>
+    <cs:effectRef idx="0"/>
+    <cs:fontRef idx="minor">
+      <a:schemeClr val="tx1">
+        <a:lumMod val="65000"/>
+        <a:lumOff val="35000"/>
+      </a:schemeClr>
+    </cs:fontRef>
+    <cs:defRPr sz="1197" kern="1200"/>
+  </cs:seriesAxis>
+  <cs:seriesLine>
+    <cs:lnRef idx="0"/>
+    <cs:fillRef idx="0"/>
+    <cs:effectRef idx="0"/>
+    <cs:fontRef idx="minor">
+      <a:schemeClr val="tx1"/>
+    </cs:fontRef>
+    <cs:spPr>
+      <a:ln w="9525" cap="flat" cmpd="sng" algn="ctr">
+        <a:solidFill>
+          <a:schemeClr val="tx1">
+            <a:lumMod val="35000"/>
+            <a:lumOff val="65000"/>
+          </a:schemeClr>
+        </a:solidFill>
+        <a:round/>
+      </a:ln>
+    </cs:spPr>
+  </cs:seriesLine>
+  <cs:title>
+    <cs:lnRef idx="0"/>
+    <cs:fillRef idx="0"/>
+    <cs:effectRef idx="0"/>
+    <cs:fontRef idx="minor">
+      <a:schemeClr val="tx1">
+        <a:lumMod val="65000"/>
+        <a:lumOff val="35000"/>
+      </a:schemeClr>
+    </cs:fontRef>
+    <cs:defRPr sz="1862" b="0" kern="1200" spc="0" baseline="0"/>
+  </cs:title>
+  <cs:trendline>
+    <cs:lnRef idx="0">
+      <cs:styleClr val="auto"/>
+    </cs:lnRef>
+    <cs:fillRef idx="0"/>
+    <cs:effectRef idx="0"/>
+    <cs:fontRef idx="minor">
+      <a:schemeClr val="tx1"/>
+    </cs:fontRef>
+    <cs:spPr>
+      <a:ln w="19050" cap="rnd">
+        <a:solidFill>
+          <a:schemeClr val="phClr"/>
+        </a:solidFill>
+        <a:prstDash val="sysDot"/>
+      </a:ln>
+    </cs:spPr>
+  </cs:trendline>
+  <cs:trendlineLabel>
+    <cs:lnRef idx="0"/>
+    <cs:fillRef idx="0"/>
+    <cs:effectRef idx="0"/>
+    <cs:fontRef idx="minor">
+      <a:schemeClr val="tx1">
+        <a:lumMod val="65000"/>
+        <a:lumOff val="35000"/>
+      </a:schemeClr>
+    </cs:fontRef>
+    <cs:defRPr sz="1197" kern="1200"/>
+  </cs:trendlineLabel>
+  <cs:upBar>
+    <cs:lnRef idx="0"/>
+    <cs:fillRef idx="0"/>
+    <cs:effectRef idx="0"/>
+    <cs:fontRef idx="minor">
+      <a:schemeClr val="tx1"/>
+    </cs:fontRef>
+    <cs:spPr>
+      <a:solidFill>
+        <a:schemeClr val="lt1"/>
+      </a:solidFill>
+      <a:ln w="9525" cap="flat" cmpd="sng" algn="ctr">
+        <a:solidFill>
+          <a:schemeClr val="tx1">
+            <a:lumMod val="65000"/>
+            <a:lumOff val="35000"/>
+          </a:schemeClr>
+        </a:solidFill>
+        <a:round/>
+      </a:ln>
+    </cs:spPr>
+  </cs:upBar>
+  <cs:valueAxis>
+    <cs:lnRef idx="0"/>
+    <cs:fillRef idx="0"/>
+    <cs:effectRef idx="0"/>
+    <cs:fontRef idx="minor">
+      <a:schemeClr val="tx1">
+        <a:lumMod val="65000"/>
+        <a:lumOff val="35000"/>
+      </a:schemeClr>
+    </cs:fontRef>
+    <cs:defRPr sz="1197" kern="1200"/>
+  </cs:valueAxis>
+  <cs:wall>
+    <cs:lnRef idx="0"/>
+    <cs:fillRef idx="0"/>
+    <cs:effectRef idx="0"/>
+    <cs:fontRef idx="minor">
+      <a:schemeClr val="tx1"/>
+    </cs:fontRef>
+    <cs:spPr>
+      <a:noFill/>
+      <a:ln>
+        <a:noFill/>
+      </a:ln>
+    </cs:spPr>
+  </cs:wall>
+</cs:chartStyle>
+</file>
+
 <file path=ppt/slideLayouts/slideLayout1.xml><?xml version="1.0" encoding="utf-8"?>
 <p:sldLayout xmlns:a="http://schemas.openxmlformats.org/drawingml/2006/main" xmlns:r="http://schemas.openxmlformats.org/officeDocument/2006/relationships" xmlns:p="http://schemas.openxmlformats.org/presentationml/2006/main" type="title" preserve="1">
   <p:cSld name="Титульный слайд">
@@ -266,7 +1051,7 @@
           <a:p>
             <a:fld id="{DF21AE8B-867D-4ABC-BE86-AE9540E29DBF}" type="datetimeFigureOut">
               <a:rPr lang="ru-RU" smtClean="0"/>
-              <a:t>25.04.2026</a:t>
+              <a:t>02.05.2026</a:t>
             </a:fld>
             <a:endParaRPr lang="ru-RU"/>
           </a:p>
@@ -464,7 +1249,7 @@
           <a:p>
             <a:fld id="{DF21AE8B-867D-4ABC-BE86-AE9540E29DBF}" type="datetimeFigureOut">
               <a:rPr lang="ru-RU" smtClean="0"/>
-              <a:t>25.04.2026</a:t>
+              <a:t>02.05.2026</a:t>
             </a:fld>
             <a:endParaRPr lang="ru-RU"/>
           </a:p>
@@ -672,7 +1457,7 @@
           <a:p>
             <a:fld id="{DF21AE8B-867D-4ABC-BE86-AE9540E29DBF}" type="datetimeFigureOut">
               <a:rPr lang="ru-RU" smtClean="0"/>
-              <a:t>25.04.2026</a:t>
+              <a:t>02.05.2026</a:t>
             </a:fld>
             <a:endParaRPr lang="ru-RU"/>
           </a:p>
@@ -870,7 +1655,7 @@
           <a:p>
             <a:fld id="{DF21AE8B-867D-4ABC-BE86-AE9540E29DBF}" type="datetimeFigureOut">
               <a:rPr lang="ru-RU" smtClean="0"/>
-              <a:t>25.04.2026</a:t>
+              <a:t>02.05.2026</a:t>
             </a:fld>
             <a:endParaRPr lang="ru-RU"/>
           </a:p>
@@ -1145,7 +1930,7 @@
           <a:p>
             <a:fld id="{DF21AE8B-867D-4ABC-BE86-AE9540E29DBF}" type="datetimeFigureOut">
               <a:rPr lang="ru-RU" smtClean="0"/>
-              <a:t>25.04.2026</a:t>
+              <a:t>02.05.2026</a:t>
             </a:fld>
             <a:endParaRPr lang="ru-RU"/>
           </a:p>
@@ -1410,7 +2195,7 @@
           <a:p>
             <a:fld id="{DF21AE8B-867D-4ABC-BE86-AE9540E29DBF}" type="datetimeFigureOut">
               <a:rPr lang="ru-RU" smtClean="0"/>
-              <a:t>25.04.2026</a:t>
+              <a:t>02.05.2026</a:t>
             </a:fld>
             <a:endParaRPr lang="ru-RU"/>
           </a:p>
@@ -1822,7 +2607,7 @@
           <a:p>
             <a:fld id="{DF21AE8B-867D-4ABC-BE86-AE9540E29DBF}" type="datetimeFigureOut">
               <a:rPr lang="ru-RU" smtClean="0"/>
-              <a:t>25.04.2026</a:t>
+              <a:t>02.05.2026</a:t>
             </a:fld>
             <a:endParaRPr lang="ru-RU"/>
           </a:p>
@@ -1963,7 +2748,7 @@
           <a:p>
             <a:fld id="{DF21AE8B-867D-4ABC-BE86-AE9540E29DBF}" type="datetimeFigureOut">
               <a:rPr lang="ru-RU" smtClean="0"/>
-              <a:t>25.04.2026</a:t>
+              <a:t>02.05.2026</a:t>
             </a:fld>
             <a:endParaRPr lang="ru-RU"/>
           </a:p>
@@ -2076,7 +2861,7 @@
           <a:p>
             <a:fld id="{DF21AE8B-867D-4ABC-BE86-AE9540E29DBF}" type="datetimeFigureOut">
               <a:rPr lang="ru-RU" smtClean="0"/>
-              <a:t>25.04.2026</a:t>
+              <a:t>02.05.2026</a:t>
             </a:fld>
             <a:endParaRPr lang="ru-RU"/>
           </a:p>
@@ -2387,7 +3172,7 @@
           <a:p>
             <a:fld id="{DF21AE8B-867D-4ABC-BE86-AE9540E29DBF}" type="datetimeFigureOut">
               <a:rPr lang="ru-RU" smtClean="0"/>
-              <a:t>25.04.2026</a:t>
+              <a:t>02.05.2026</a:t>
             </a:fld>
             <a:endParaRPr lang="ru-RU"/>
           </a:p>
@@ -2675,7 +3460,7 @@
           <a:p>
             <a:fld id="{DF21AE8B-867D-4ABC-BE86-AE9540E29DBF}" type="datetimeFigureOut">
               <a:rPr lang="ru-RU" smtClean="0"/>
-              <a:t>25.04.2026</a:t>
+              <a:t>02.05.2026</a:t>
             </a:fld>
             <a:endParaRPr lang="ru-RU"/>
           </a:p>
@@ -2916,7 +3701,7 @@
           <a:p>
             <a:fld id="{DF21AE8B-867D-4ABC-BE86-AE9540E29DBF}" type="datetimeFigureOut">
               <a:rPr lang="ru-RU" smtClean="0"/>
-              <a:t>25.04.2026</a:t>
+              <a:t>02.05.2026</a:t>
             </a:fld>
             <a:endParaRPr lang="ru-RU"/>
           </a:p>
@@ -3442,7 +4227,7 @@
           <p:cNvPr id="2" name="Заголовок 1">
             <a:extLst>
               <a:ext uri="{FF2B5EF4-FFF2-40B4-BE49-F238E27FC236}">
-                <a16:creationId xmlns:a16="http://schemas.microsoft.com/office/drawing/2014/main" id="{735E2F9D-62DD-AF87-5641-A3729B798A79}"/>
+                <a16:creationId xmlns:a16="http://schemas.microsoft.com/office/drawing/2014/main" id="{AD42D016-5CA9-45C7-33DE-98D76267309E}"/>
               </a:ext>
             </a:extLst>
           </p:cNvPr>
@@ -3460,7 +4245,139 @@
           <a:p>
             <a:r>
               <a:rPr lang="ru-RU" dirty="0"/>
-              <a:t>Что мой проект из себя представляет?</a:t>
+              <a:t>Проблемы </a:t>
+            </a:r>
+          </a:p>
+        </p:txBody>
+      </p:sp>
+      <p:sp>
+        <p:nvSpPr>
+          <p:cNvPr id="3" name="Объект 2">
+            <a:extLst>
+              <a:ext uri="{FF2B5EF4-FFF2-40B4-BE49-F238E27FC236}">
+                <a16:creationId xmlns:a16="http://schemas.microsoft.com/office/drawing/2014/main" id="{424F2D1E-7E3E-4690-0DA1-6F0B3547ECC0}"/>
+              </a:ext>
+            </a:extLst>
+          </p:cNvPr>
+          <p:cNvSpPr>
+            <a:spLocks noGrp="1"/>
+          </p:cNvSpPr>
+          <p:nvPr>
+            <p:ph idx="1"/>
+          </p:nvPr>
+        </p:nvSpPr>
+        <p:spPr>
+          <a:xfrm>
+            <a:off x="838200" y="1825625"/>
+            <a:ext cx="4144347" cy="3026293"/>
+          </a:xfrm>
+        </p:spPr>
+        <p:txBody>
+          <a:bodyPr/>
+          <a:lstStyle/>
+          <a:p>
+            <a:r>
+              <a:rPr lang="ru-RU" dirty="0"/>
+              <a:t>Обеспечение чистоты в подъезде:</a:t>
+            </a:r>
+          </a:p>
+          <a:p>
+            <a:r>
+              <a:rPr lang="ru-RU" dirty="0"/>
+              <a:t>Маломобильные граждане:</a:t>
+            </a:r>
+          </a:p>
+          <a:p>
+            <a:r>
+              <a:rPr lang="ru-RU" dirty="0"/>
+              <a:t>Трудовая занятость подростков:</a:t>
+            </a:r>
+          </a:p>
+        </p:txBody>
+      </p:sp>
+      <p:pic>
+        <p:nvPicPr>
+          <p:cNvPr id="4" name="Image 0">
+            <a:extLst>
+              <a:ext uri="{FF2B5EF4-FFF2-40B4-BE49-F238E27FC236}">
+                <a16:creationId xmlns:a16="http://schemas.microsoft.com/office/drawing/2014/main" id="{93F11DBE-8522-8604-D483-8586124A5C80}"/>
+              </a:ext>
+            </a:extLst>
+          </p:cNvPr>
+          <p:cNvPicPr>
+            <a:picLocks noChangeAspect="1"/>
+          </p:cNvPicPr>
+          <p:nvPr/>
+        </p:nvPicPr>
+        <p:blipFill>
+          <a:blip r:embed="rId2"/>
+          <a:srcRect l="1046" t="-2779" r="-1046" b="2779"/>
+          <a:stretch/>
+        </p:blipFill>
+        <p:spPr>
+          <a:xfrm>
+            <a:off x="5174405" y="1479644"/>
+            <a:ext cx="6768779" cy="4003400"/>
+          </a:xfrm>
+          <a:prstGeom prst="rect">
+            <a:avLst/>
+          </a:prstGeom>
+        </p:spPr>
+      </p:pic>
+    </p:spTree>
+    <p:extLst>
+      <p:ext uri="{BB962C8B-B14F-4D97-AF65-F5344CB8AC3E}">
+        <p14:creationId xmlns:p14="http://schemas.microsoft.com/office/powerpoint/2010/main" val="1170040951"/>
+      </p:ext>
+    </p:extLst>
+  </p:cSld>
+  <p:clrMapOvr>
+    <a:masterClrMapping/>
+  </p:clrMapOvr>
+</p:sld>
+</file>
+
+<file path=ppt/slides/slide3.xml><?xml version="1.0" encoding="utf-8"?>
+<p:sld xmlns:a="http://schemas.openxmlformats.org/drawingml/2006/main" xmlns:r="http://schemas.openxmlformats.org/officeDocument/2006/relationships" xmlns:p="http://schemas.openxmlformats.org/presentationml/2006/main">
+  <p:cSld>
+    <p:spTree>
+      <p:nvGrpSpPr>
+        <p:cNvPr id="1" name=""/>
+        <p:cNvGrpSpPr/>
+        <p:nvPr/>
+      </p:nvGrpSpPr>
+      <p:grpSpPr>
+        <a:xfrm>
+          <a:off x="0" y="0"/>
+          <a:ext cx="0" cy="0"/>
+          <a:chOff x="0" y="0"/>
+          <a:chExt cx="0" cy="0"/>
+        </a:xfrm>
+      </p:grpSpPr>
+      <p:sp>
+        <p:nvSpPr>
+          <p:cNvPr id="2" name="Заголовок 1">
+            <a:extLst>
+              <a:ext uri="{FF2B5EF4-FFF2-40B4-BE49-F238E27FC236}">
+                <a16:creationId xmlns:a16="http://schemas.microsoft.com/office/drawing/2014/main" id="{735E2F9D-62DD-AF87-5641-A3729B798A79}"/>
+              </a:ext>
+            </a:extLst>
+          </p:cNvPr>
+          <p:cNvSpPr>
+            <a:spLocks noGrp="1"/>
+          </p:cNvSpPr>
+          <p:nvPr>
+            <p:ph type="title"/>
+          </p:nvPr>
+        </p:nvSpPr>
+        <p:spPr/>
+        <p:txBody>
+          <a:bodyPr/>
+          <a:lstStyle/>
+          <a:p>
+            <a:r>
+              <a:rPr lang="ru-RU" dirty="0"/>
+              <a:t>Решение</a:t>
             </a:r>
           </a:p>
         </p:txBody>
@@ -3651,129 +4568,6 @@
 </p:sld>
 </file>
 
-<file path=ppt/slides/slide3.xml><?xml version="1.0" encoding="utf-8"?>
-<p:sld xmlns:a="http://schemas.openxmlformats.org/drawingml/2006/main" xmlns:r="http://schemas.openxmlformats.org/officeDocument/2006/relationships" xmlns:p="http://schemas.openxmlformats.org/presentationml/2006/main">
-  <p:cSld>
-    <p:spTree>
-      <p:nvGrpSpPr>
-        <p:cNvPr id="1" name=""/>
-        <p:cNvGrpSpPr/>
-        <p:nvPr/>
-      </p:nvGrpSpPr>
-      <p:grpSpPr>
-        <a:xfrm>
-          <a:off x="0" y="0"/>
-          <a:ext cx="0" cy="0"/>
-          <a:chOff x="0" y="0"/>
-          <a:chExt cx="0" cy="0"/>
-        </a:xfrm>
-      </p:grpSpPr>
-      <p:sp>
-        <p:nvSpPr>
-          <p:cNvPr id="2" name="Заголовок 1">
-            <a:extLst>
-              <a:ext uri="{FF2B5EF4-FFF2-40B4-BE49-F238E27FC236}">
-                <a16:creationId xmlns:a16="http://schemas.microsoft.com/office/drawing/2014/main" id="{812BFEDC-28B4-E922-41A2-3C82CF1FE0FC}"/>
-              </a:ext>
-            </a:extLst>
-          </p:cNvPr>
-          <p:cNvSpPr>
-            <a:spLocks noGrp="1"/>
-          </p:cNvSpPr>
-          <p:nvPr>
-            <p:ph type="title"/>
-          </p:nvPr>
-        </p:nvSpPr>
-        <p:spPr/>
-        <p:txBody>
-          <a:bodyPr/>
-          <a:lstStyle/>
-          <a:p>
-            <a:r>
-              <a:rPr lang="ru-RU" dirty="0"/>
-              <a:t>Экономическая составляющая</a:t>
-            </a:r>
-          </a:p>
-        </p:txBody>
-      </p:sp>
-      <p:sp>
-        <p:nvSpPr>
-          <p:cNvPr id="3" name="Объект 2">
-            <a:extLst>
-              <a:ext uri="{FF2B5EF4-FFF2-40B4-BE49-F238E27FC236}">
-                <a16:creationId xmlns:a16="http://schemas.microsoft.com/office/drawing/2014/main" id="{DCA455A7-A12E-2048-801F-C1F182544E1B}"/>
-              </a:ext>
-            </a:extLst>
-          </p:cNvPr>
-          <p:cNvSpPr>
-            <a:spLocks noGrp="1"/>
-          </p:cNvSpPr>
-          <p:nvPr>
-            <p:ph idx="1"/>
-          </p:nvPr>
-        </p:nvSpPr>
-        <p:spPr>
-          <a:xfrm>
-            <a:off x="817984" y="1778972"/>
-            <a:ext cx="5872065" cy="4351338"/>
-          </a:xfrm>
-        </p:spPr>
-        <p:txBody>
-          <a:bodyPr>
-            <a:normAutofit/>
-          </a:bodyPr>
-          <a:lstStyle/>
-          <a:p>
-            <a:r>
-              <a:rPr lang="ru-RU" dirty="0"/>
-              <a:t>Рентабельность обеспечивается низкими затратами на запуск Комиссия покрывает расходы.</a:t>
-            </a:r>
-          </a:p>
-        </p:txBody>
-      </p:sp>
-      <p:pic>
-        <p:nvPicPr>
-          <p:cNvPr id="5" name="Рисунок 4">
-            <a:extLst>
-              <a:ext uri="{FF2B5EF4-FFF2-40B4-BE49-F238E27FC236}">
-                <a16:creationId xmlns:a16="http://schemas.microsoft.com/office/drawing/2014/main" id="{66116660-F5C2-7997-3076-E86C289993EE}"/>
-              </a:ext>
-            </a:extLst>
-          </p:cNvPr>
-          <p:cNvPicPr>
-            <a:picLocks noChangeAspect="1"/>
-          </p:cNvPicPr>
-          <p:nvPr/>
-        </p:nvPicPr>
-        <p:blipFill>
-          <a:blip r:embed="rId2"/>
-          <a:stretch>
-            <a:fillRect/>
-          </a:stretch>
-        </p:blipFill>
-        <p:spPr>
-          <a:xfrm>
-            <a:off x="6690049" y="1557076"/>
-            <a:ext cx="5220429" cy="3743847"/>
-          </a:xfrm>
-          <a:prstGeom prst="rect">
-            <a:avLst/>
-          </a:prstGeom>
-        </p:spPr>
-      </p:pic>
-    </p:spTree>
-    <p:extLst>
-      <p:ext uri="{BB962C8B-B14F-4D97-AF65-F5344CB8AC3E}">
-        <p14:creationId xmlns:p14="http://schemas.microsoft.com/office/powerpoint/2010/main" val="3846395529"/>
-      </p:ext>
-    </p:extLst>
-  </p:cSld>
-  <p:clrMapOvr>
-    <a:masterClrMapping/>
-  </p:clrMapOvr>
-</p:sld>
-</file>
-
 <file path=ppt/slides/slide4.xml><?xml version="1.0" encoding="utf-8"?>
 <p:sld xmlns:a="http://schemas.openxmlformats.org/drawingml/2006/main" xmlns:r="http://schemas.openxmlformats.org/officeDocument/2006/relationships" xmlns:p="http://schemas.openxmlformats.org/presentationml/2006/main">
   <p:cSld>
@@ -3796,7 +4590,7 @@
           <p:cNvPr id="2" name="Заголовок 1">
             <a:extLst>
               <a:ext uri="{FF2B5EF4-FFF2-40B4-BE49-F238E27FC236}">
-                <a16:creationId xmlns:a16="http://schemas.microsoft.com/office/drawing/2014/main" id="{31E4D03F-B279-33E8-9E5B-B186C265B253}"/>
+                <a16:creationId xmlns:a16="http://schemas.microsoft.com/office/drawing/2014/main" id="{812BFEDC-28B4-E922-41A2-3C82CF1FE0FC}"/>
               </a:ext>
             </a:extLst>
           </p:cNvPr>
@@ -3814,7 +4608,7 @@
           <a:p>
             <a:r>
               <a:rPr lang="ru-RU" dirty="0"/>
-              <a:t>Сезонность</a:t>
+              <a:t>Экономическая составляющая</a:t>
             </a:r>
           </a:p>
         </p:txBody>
@@ -3824,7 +4618,7 @@
           <p:cNvPr id="3" name="Объект 2">
             <a:extLst>
               <a:ext uri="{FF2B5EF4-FFF2-40B4-BE49-F238E27FC236}">
-                <a16:creationId xmlns:a16="http://schemas.microsoft.com/office/drawing/2014/main" id="{D1990373-E690-9C53-1B64-35C62D156343}"/>
+                <a16:creationId xmlns:a16="http://schemas.microsoft.com/office/drawing/2014/main" id="{DCA455A7-A12E-2048-801F-C1F182544E1B}"/>
               </a:ext>
             </a:extLst>
           </p:cNvPr>
@@ -3837,8 +4631,8 @@
         </p:nvSpPr>
         <p:spPr>
           <a:xfrm>
-            <a:off x="838200" y="1825625"/>
-            <a:ext cx="5257800" cy="4351338"/>
+            <a:off x="817985" y="1778972"/>
+            <a:ext cx="4033934" cy="2513110"/>
           </a:xfrm>
         </p:spPr>
         <p:txBody>
@@ -3849,62 +4643,43 @@
           <a:p>
             <a:r>
               <a:rPr lang="ru-RU" dirty="0"/>
-              <a:t>Лето - пиковый сезон для сервиса: у школьников каникулы (больше времени для работы), а сезон отпусков и ремонтов увеличивает спрос на вывоз мусора.</a:t>
-            </a:r>
-          </a:p>
-        </p:txBody>
-      </p:sp>
-      <p:pic>
-        <p:nvPicPr>
-          <p:cNvPr id="3076" name="Picture 4">
-            <a:extLst>
-              <a:ext uri="{FF2B5EF4-FFF2-40B4-BE49-F238E27FC236}">
-                <a16:creationId xmlns:a16="http://schemas.microsoft.com/office/drawing/2014/main" id="{C815A2E4-12D6-B924-D0D1-C4EFDA724EAA}"/>
-              </a:ext>
-            </a:extLst>
-          </p:cNvPr>
-          <p:cNvPicPr>
-            <a:picLocks noChangeAspect="1" noChangeArrowheads="1"/>
-          </p:cNvPicPr>
-          <p:nvPr/>
-        </p:nvPicPr>
-        <p:blipFill>
-          <a:blip r:embed="rId2">
-            <a:extLst>
-              <a:ext uri="{28A0092B-C50C-407E-A947-70E740481C1C}">
-                <a14:useLocalDpi xmlns:a14="http://schemas.microsoft.com/office/drawing/2010/main" val="0"/>
-              </a:ext>
-            </a:extLst>
-          </a:blip>
-          <a:srcRect/>
-          <a:stretch>
-            <a:fillRect/>
-          </a:stretch>
-        </p:blipFill>
-        <p:spPr bwMode="auto">
-          <a:xfrm>
-            <a:off x="6403909" y="1928264"/>
-            <a:ext cx="5577749" cy="3110269"/>
-          </a:xfrm>
-          <a:prstGeom prst="rect">
-            <a:avLst/>
-          </a:prstGeom>
-          <a:noFill/>
-          <a:extLst>
-            <a:ext uri="{909E8E84-426E-40DD-AFC4-6F175D3DCCD1}">
-              <a14:hiddenFill xmlns:a14="http://schemas.microsoft.com/office/drawing/2010/main">
-                <a:solidFill>
-                  <a:srgbClr val="FFFFFF"/>
-                </a:solidFill>
-              </a14:hiddenFill>
-            </a:ext>
-          </a:extLst>
-        </p:spPr>
-      </p:pic>
+              <a:t>Рентабельность обеспечивается низкими затратами на запуск Комиссия 15% покрывает расходы.</a:t>
+            </a:r>
+          </a:p>
+        </p:txBody>
+      </p:sp>
+      <p:graphicFrame>
+        <p:nvGraphicFramePr>
+          <p:cNvPr id="27" name="Диаграмма 26">
+            <a:extLst>
+              <a:ext uri="{FF2B5EF4-FFF2-40B4-BE49-F238E27FC236}">
+                <a16:creationId xmlns:a16="http://schemas.microsoft.com/office/drawing/2014/main" id="{CDB57D6C-DF3B-1916-888F-6016B1E65CE1}"/>
+              </a:ext>
+            </a:extLst>
+          </p:cNvPr>
+          <p:cNvGraphicFramePr/>
+          <p:nvPr>
+            <p:extLst>
+              <p:ext uri="{D42A27DB-BD31-4B8C-83A1-F6EECF244321}">
+                <p14:modId xmlns:p14="http://schemas.microsoft.com/office/powerpoint/2010/main" val="1848267647"/>
+              </p:ext>
+            </p:extLst>
+          </p:nvPr>
+        </p:nvGraphicFramePr>
+        <p:xfrm>
+          <a:off x="4851919" y="1690688"/>
+          <a:ext cx="6391469" cy="5008692"/>
+        </p:xfrm>
+        <a:graphic>
+          <a:graphicData uri="http://schemas.openxmlformats.org/drawingml/2006/chart">
+            <c:chart xmlns:c="http://schemas.openxmlformats.org/drawingml/2006/chart" xmlns:r="http://schemas.openxmlformats.org/officeDocument/2006/relationships" r:id="rId2"/>
+          </a:graphicData>
+        </a:graphic>
+      </p:graphicFrame>
     </p:spTree>
     <p:extLst>
       <p:ext uri="{BB962C8B-B14F-4D97-AF65-F5344CB8AC3E}">
-        <p14:creationId xmlns:p14="http://schemas.microsoft.com/office/powerpoint/2010/main" val="3704205432"/>
+        <p14:creationId xmlns:p14="http://schemas.microsoft.com/office/powerpoint/2010/main" val="3846395529"/>
       </p:ext>
     </p:extLst>
   </p:cSld>
@@ -3936,7 +4711,7 @@
           <p:cNvPr id="2" name="Заголовок 1">
             <a:extLst>
               <a:ext uri="{FF2B5EF4-FFF2-40B4-BE49-F238E27FC236}">
-                <a16:creationId xmlns:a16="http://schemas.microsoft.com/office/drawing/2014/main" id="{0715F0C1-8D91-CA0D-4C00-010D8D7069A9}"/>
+                <a16:creationId xmlns:a16="http://schemas.microsoft.com/office/drawing/2014/main" id="{31E4D03F-B279-33E8-9E5B-B186C265B253}"/>
               </a:ext>
             </a:extLst>
           </p:cNvPr>
@@ -3954,1055 +4729,80 @@
           <a:p>
             <a:r>
               <a:rPr lang="ru-RU" dirty="0"/>
-              <a:t>Конкурентный анализ</a:t>
-            </a:r>
-          </a:p>
-        </p:txBody>
-      </p:sp>
-      <p:graphicFrame>
-        <p:nvGraphicFramePr>
-          <p:cNvPr id="5" name="Таблица 4">
-            <a:extLst>
-              <a:ext uri="{FF2B5EF4-FFF2-40B4-BE49-F238E27FC236}">
-                <a16:creationId xmlns:a16="http://schemas.microsoft.com/office/drawing/2014/main" id="{BB36DCFB-6536-0286-3BF9-F1EF81959F81}"/>
-              </a:ext>
-            </a:extLst>
-          </p:cNvPr>
-          <p:cNvGraphicFramePr>
-            <a:graphicFrameLocks noGrp="1"/>
-          </p:cNvGraphicFramePr>
-          <p:nvPr>
-            <p:extLst>
-              <p:ext uri="{D42A27DB-BD31-4B8C-83A1-F6EECF244321}">
-                <p14:modId xmlns:p14="http://schemas.microsoft.com/office/powerpoint/2010/main" val="127152909"/>
-              </p:ext>
-            </p:extLst>
-          </p:nvPr>
-        </p:nvGraphicFramePr>
-        <p:xfrm>
-          <a:off x="838200" y="1352939"/>
-          <a:ext cx="10703766" cy="5346630"/>
-        </p:xfrm>
-        <a:graphic>
-          <a:graphicData uri="http://schemas.openxmlformats.org/drawingml/2006/table">
-            <a:tbl>
-              <a:tblPr>
-                <a:tableStyleId>{3C2FFA5D-87B4-456A-9821-1D502468CF0F}</a:tableStyleId>
-              </a:tblPr>
-              <a:tblGrid>
-                <a:gridCol w="1783961">
-                  <a:extLst>
-                    <a:ext uri="{9D8B030D-6E8A-4147-A177-3AD203B41FA5}">
-                      <a16:colId xmlns:a16="http://schemas.microsoft.com/office/drawing/2014/main" val="812569972"/>
-                    </a:ext>
-                  </a:extLst>
-                </a:gridCol>
-                <a:gridCol w="1783961">
-                  <a:extLst>
-                    <a:ext uri="{9D8B030D-6E8A-4147-A177-3AD203B41FA5}">
-                      <a16:colId xmlns:a16="http://schemas.microsoft.com/office/drawing/2014/main" val="4120129658"/>
-                    </a:ext>
-                  </a:extLst>
-                </a:gridCol>
-                <a:gridCol w="1783961">
-                  <a:extLst>
-                    <a:ext uri="{9D8B030D-6E8A-4147-A177-3AD203B41FA5}">
-                      <a16:colId xmlns:a16="http://schemas.microsoft.com/office/drawing/2014/main" val="1201958830"/>
-                    </a:ext>
-                  </a:extLst>
-                </a:gridCol>
-                <a:gridCol w="1783961">
-                  <a:extLst>
-                    <a:ext uri="{9D8B030D-6E8A-4147-A177-3AD203B41FA5}">
-                      <a16:colId xmlns:a16="http://schemas.microsoft.com/office/drawing/2014/main" val="3572462965"/>
-                    </a:ext>
-                  </a:extLst>
-                </a:gridCol>
-                <a:gridCol w="1783961">
-                  <a:extLst>
-                    <a:ext uri="{9D8B030D-6E8A-4147-A177-3AD203B41FA5}">
-                      <a16:colId xmlns:a16="http://schemas.microsoft.com/office/drawing/2014/main" val="519290226"/>
-                    </a:ext>
-                  </a:extLst>
-                </a:gridCol>
-                <a:gridCol w="1783961">
-                  <a:extLst>
-                    <a:ext uri="{9D8B030D-6E8A-4147-A177-3AD203B41FA5}">
-                      <a16:colId xmlns:a16="http://schemas.microsoft.com/office/drawing/2014/main" val="1078457532"/>
-                    </a:ext>
-                  </a:extLst>
-                </a:gridCol>
-              </a:tblGrid>
-              <a:tr h="352026">
-                <a:tc>
-                  <a:txBody>
-                    <a:bodyPr/>
-                    <a:lstStyle/>
-                    <a:p>
-                      <a:r>
-                        <a:rPr lang="ru-RU" sz="1200" dirty="0"/>
-                        <a:t>Критерий</a:t>
-                      </a:r>
-                    </a:p>
-                  </a:txBody>
-                  <a:tcPr marL="35667" marR="35667" marT="17833" marB="17833" anchor="ctr"/>
-                </a:tc>
-                <a:tc>
-                  <a:txBody>
-                    <a:bodyPr/>
-                    <a:lstStyle/>
-                    <a:p>
-                      <a:r>
-                        <a:rPr lang="en-US" sz="1200" b="1"/>
-                        <a:t>TrashOut</a:t>
-                      </a:r>
-                      <a:endParaRPr lang="en-US" sz="1200"/>
-                    </a:p>
-                  </a:txBody>
-                  <a:tcPr marL="35667" marR="35667" marT="17833" marB="17833" anchor="ctr"/>
-                </a:tc>
-                <a:tc>
-                  <a:txBody>
-                    <a:bodyPr/>
-                    <a:lstStyle/>
-                    <a:p>
-                      <a:r>
-                        <a:rPr lang="ru-RU" sz="1200"/>
-                        <a:t>МусорОФФ</a:t>
-                      </a:r>
-                    </a:p>
-                  </a:txBody>
-                  <a:tcPr marL="35667" marR="35667" marT="17833" marB="17833" anchor="ctr"/>
-                </a:tc>
-                <a:tc>
-                  <a:txBody>
-                    <a:bodyPr/>
-                    <a:lstStyle/>
-                    <a:p>
-                      <a:r>
-                        <a:rPr lang="ru-RU" sz="1200"/>
-                        <a:t>Убиратор</a:t>
-                      </a:r>
-                    </a:p>
-                  </a:txBody>
-                  <a:tcPr marL="35667" marR="35667" marT="17833" marB="17833" anchor="ctr"/>
-                </a:tc>
-                <a:tc>
-                  <a:txBody>
-                    <a:bodyPr/>
-                    <a:lstStyle/>
-                    <a:p>
-                      <a:r>
-                        <a:rPr lang="ru-RU" sz="1200"/>
-                        <a:t>Экологистика / Баласка</a:t>
-                      </a:r>
-                    </a:p>
-                  </a:txBody>
-                  <a:tcPr marL="35667" marR="35667" marT="17833" marB="17833" anchor="ctr"/>
-                </a:tc>
-                <a:tc>
-                  <a:txBody>
-                    <a:bodyPr/>
-                    <a:lstStyle/>
-                    <a:p>
-                      <a:r>
-                        <a:rPr lang="ru-RU" sz="1200"/>
-                        <a:t>Соцпроекты (Чистоплюйка)</a:t>
-                      </a:r>
-                    </a:p>
-                  </a:txBody>
-                  <a:tcPr marL="35667" marR="35667" marT="17833" marB="17833" anchor="ctr"/>
-                </a:tc>
-                <a:extLst>
-                  <a:ext uri="{0D108BD9-81ED-4DB2-BD59-A6C34878D82A}">
-                    <a16:rowId xmlns:a16="http://schemas.microsoft.com/office/drawing/2014/main" val="1201525749"/>
-                  </a:ext>
-                </a:extLst>
-              </a:tr>
-              <a:tr h="676899">
-                <a:tc>
-                  <a:txBody>
-                    <a:bodyPr/>
-                    <a:lstStyle/>
-                    <a:p>
-                      <a:r>
-                        <a:rPr lang="ru-RU" sz="1200" b="1"/>
-                        <a:t>Тип сервиса</a:t>
-                      </a:r>
-                      <a:endParaRPr lang="ru-RU" sz="1200"/>
-                    </a:p>
-                  </a:txBody>
-                  <a:tcPr marL="35667" marR="35667" marT="17833" marB="17833" anchor="ctr"/>
-                </a:tc>
-                <a:tc>
-                  <a:txBody>
-                    <a:bodyPr/>
-                    <a:lstStyle/>
-                    <a:p>
-                      <a:r>
-                        <a:rPr lang="ru-RU" sz="1200"/>
-                        <a:t>Агрегатор микрозаказов в </a:t>
-                      </a:r>
-                      <a:r>
-                        <a:rPr lang="en-US" sz="1200"/>
-                        <a:t>Telegram</a:t>
-                      </a:r>
-                    </a:p>
-                  </a:txBody>
-                  <a:tcPr marL="35667" marR="35667" marT="17833" marB="17833" anchor="ctr"/>
-                </a:tc>
-                <a:tc>
-                  <a:txBody>
-                    <a:bodyPr/>
-                    <a:lstStyle/>
-                    <a:p>
-                      <a:r>
-                        <a:rPr lang="ru-RU" sz="1200" dirty="0"/>
-                        <a:t>Вывоз мусора курьерами</a:t>
-                      </a:r>
-                    </a:p>
-                  </a:txBody>
-                  <a:tcPr marL="35667" marR="35667" marT="17833" marB="17833" anchor="ctr"/>
-                </a:tc>
-                <a:tc>
-                  <a:txBody>
-                    <a:bodyPr/>
-                    <a:lstStyle/>
-                    <a:p>
-                      <a:r>
-                        <a:rPr lang="en-US" sz="1200"/>
-                        <a:t>B2B/B2C </a:t>
-                      </a:r>
-                      <a:r>
-                        <a:rPr lang="ru-RU" sz="1200"/>
-                        <a:t>вывоз отходов</a:t>
-                      </a:r>
-                    </a:p>
-                  </a:txBody>
-                  <a:tcPr marL="35667" marR="35667" marT="17833" marB="17833" anchor="ctr"/>
-                </a:tc>
-                <a:tc>
-                  <a:txBody>
-                    <a:bodyPr/>
-                    <a:lstStyle/>
-                    <a:p>
-                      <a:r>
-                        <a:rPr lang="ru-RU" sz="1200"/>
-                        <a:t>Вывоз крупногабаритного и строительного мусора</a:t>
-                      </a:r>
-                    </a:p>
-                  </a:txBody>
-                  <a:tcPr marL="35667" marR="35667" marT="17833" marB="17833" anchor="ctr"/>
-                </a:tc>
-                <a:tc>
-                  <a:txBody>
-                    <a:bodyPr/>
-                    <a:lstStyle/>
-                    <a:p>
-                      <a:r>
-                        <a:rPr lang="ru-RU" sz="1200"/>
-                        <a:t>Волонтёрские / некоммерческие инициативы</a:t>
-                      </a:r>
-                    </a:p>
-                  </a:txBody>
-                  <a:tcPr marL="35667" marR="35667" marT="17833" marB="17833" anchor="ctr"/>
-                </a:tc>
-                <a:extLst>
-                  <a:ext uri="{0D108BD9-81ED-4DB2-BD59-A6C34878D82A}">
-                    <a16:rowId xmlns:a16="http://schemas.microsoft.com/office/drawing/2014/main" val="2909554502"/>
-                  </a:ext>
-                </a:extLst>
-              </a:tr>
-              <a:tr h="514463">
-                <a:tc>
-                  <a:txBody>
-                    <a:bodyPr/>
-                    <a:lstStyle/>
-                    <a:p>
-                      <a:r>
-                        <a:rPr lang="ru-RU" sz="1200" b="1"/>
-                        <a:t>Целевая аудитория</a:t>
-                      </a:r>
-                      <a:endParaRPr lang="ru-RU" sz="1200"/>
-                    </a:p>
-                  </a:txBody>
-                  <a:tcPr marL="35667" marR="35667" marT="17833" marB="17833" anchor="ctr"/>
-                </a:tc>
-                <a:tc>
-                  <a:txBody>
-                    <a:bodyPr/>
-                    <a:lstStyle/>
-                    <a:p>
-                      <a:r>
-                        <a:rPr lang="ru-RU" sz="1200"/>
-                        <a:t>Жители многоквартирных домов (микрозаказы)</a:t>
-                      </a:r>
-                    </a:p>
-                  </a:txBody>
-                  <a:tcPr marL="35667" marR="35667" marT="17833" marB="17833" anchor="ctr"/>
-                </a:tc>
-                <a:tc>
-                  <a:txBody>
-                    <a:bodyPr/>
-                    <a:lstStyle/>
-                    <a:p>
-                      <a:r>
-                        <a:rPr lang="ru-RU" sz="1200"/>
-                        <a:t>Физлица, нуждающиеся в быстром вывозе</a:t>
-                      </a:r>
-                    </a:p>
-                  </a:txBody>
-                  <a:tcPr marL="35667" marR="35667" marT="17833" marB="17833" anchor="ctr"/>
-                </a:tc>
-                <a:tc>
-                  <a:txBody>
-                    <a:bodyPr/>
-                    <a:lstStyle/>
-                    <a:p>
-                      <a:r>
-                        <a:rPr lang="ru-RU" sz="1200"/>
-                        <a:t>Физлица, офисы</a:t>
-                      </a:r>
-                    </a:p>
-                  </a:txBody>
-                  <a:tcPr marL="35667" marR="35667" marT="17833" marB="17833" anchor="ctr"/>
-                </a:tc>
-                <a:tc>
-                  <a:txBody>
-                    <a:bodyPr/>
-                    <a:lstStyle/>
-                    <a:p>
-                      <a:r>
-                        <a:rPr lang="ru-RU" sz="1200"/>
-                        <a:t>Юридические лица, стройки</a:t>
-                      </a:r>
-                    </a:p>
-                  </a:txBody>
-                  <a:tcPr marL="35667" marR="35667" marT="17833" marB="17833" anchor="ctr"/>
-                </a:tc>
-                <a:tc>
-                  <a:txBody>
-                    <a:bodyPr/>
-                    <a:lstStyle/>
-                    <a:p>
-                      <a:r>
-                        <a:rPr lang="ru-RU" sz="1200"/>
-                        <a:t>Экоактивисты, локальные сообщества</a:t>
-                      </a:r>
-                    </a:p>
-                  </a:txBody>
-                  <a:tcPr marL="35667" marR="35667" marT="17833" marB="17833" anchor="ctr"/>
-                </a:tc>
-                <a:extLst>
-                  <a:ext uri="{0D108BD9-81ED-4DB2-BD59-A6C34878D82A}">
-                    <a16:rowId xmlns:a16="http://schemas.microsoft.com/office/drawing/2014/main" val="2467197881"/>
-                  </a:ext>
-                </a:extLst>
-              </a:tr>
-              <a:tr h="514463">
-                <a:tc>
-                  <a:txBody>
-                    <a:bodyPr/>
-                    <a:lstStyle/>
-                    <a:p>
-                      <a:r>
-                        <a:rPr lang="ru-RU" sz="1200" b="1"/>
-                        <a:t>Исполнители</a:t>
-                      </a:r>
-                      <a:endParaRPr lang="ru-RU" sz="1200"/>
-                    </a:p>
-                  </a:txBody>
-                  <a:tcPr marL="35667" marR="35667" marT="17833" marB="17833" anchor="ctr"/>
-                </a:tc>
-                <a:tc>
-                  <a:txBody>
-                    <a:bodyPr/>
-                    <a:lstStyle/>
-                    <a:p>
-                      <a:r>
-                        <a:rPr lang="ru-RU" sz="1200"/>
-                        <a:t>Школьники (живут в том же доме/подъезде)</a:t>
-                      </a:r>
-                    </a:p>
-                  </a:txBody>
-                  <a:tcPr marL="35667" marR="35667" marT="17833" marB="17833" anchor="ctr"/>
-                </a:tc>
-                <a:tc>
-                  <a:txBody>
-                    <a:bodyPr/>
-                    <a:lstStyle/>
-                    <a:p>
-                      <a:r>
-                        <a:rPr lang="ru-RU" sz="1200"/>
-                        <a:t>Штатные курьеры или самозанятые</a:t>
-                      </a:r>
-                    </a:p>
-                  </a:txBody>
-                  <a:tcPr marL="35667" marR="35667" marT="17833" marB="17833" anchor="ctr"/>
-                </a:tc>
-                <a:tc>
-                  <a:txBody>
-                    <a:bodyPr/>
-                    <a:lstStyle/>
-                    <a:p>
-                      <a:r>
-                        <a:rPr lang="ru-RU" sz="1200"/>
-                        <a:t>Штатные сотрудники</a:t>
-                      </a:r>
-                    </a:p>
-                  </a:txBody>
-                  <a:tcPr marL="35667" marR="35667" marT="17833" marB="17833" anchor="ctr"/>
-                </a:tc>
-                <a:tc>
-                  <a:txBody>
-                    <a:bodyPr/>
-                    <a:lstStyle/>
-                    <a:p>
-                      <a:r>
-                        <a:rPr lang="ru-RU" sz="1200"/>
-                        <a:t>Наёмные водители</a:t>
-                      </a:r>
-                    </a:p>
-                  </a:txBody>
-                  <a:tcPr marL="35667" marR="35667" marT="17833" marB="17833" anchor="ctr"/>
-                </a:tc>
-                <a:tc>
-                  <a:txBody>
-                    <a:bodyPr/>
-                    <a:lstStyle/>
-                    <a:p>
-                      <a:r>
-                        <a:rPr lang="ru-RU" sz="1200"/>
-                        <a:t>Волонтёры (бесплатно)</a:t>
-                      </a:r>
-                    </a:p>
-                  </a:txBody>
-                  <a:tcPr marL="35667" marR="35667" marT="17833" marB="17833" anchor="ctr"/>
-                </a:tc>
-                <a:extLst>
-                  <a:ext uri="{0D108BD9-81ED-4DB2-BD59-A6C34878D82A}">
-                    <a16:rowId xmlns:a16="http://schemas.microsoft.com/office/drawing/2014/main" val="1244126009"/>
-                  </a:ext>
-                </a:extLst>
-              </a:tr>
-              <a:tr h="352026">
-                <a:tc>
-                  <a:txBody>
-                    <a:bodyPr/>
-                    <a:lstStyle/>
-                    <a:p>
-                      <a:r>
-                        <a:rPr lang="ru-RU" sz="1200" b="1"/>
-                        <a:t>Стоимость для клиента</a:t>
-                      </a:r>
-                      <a:endParaRPr lang="ru-RU" sz="1200"/>
-                    </a:p>
-                  </a:txBody>
-                  <a:tcPr marL="35667" marR="35667" marT="17833" marB="17833" anchor="ctr"/>
-                </a:tc>
-                <a:tc>
-                  <a:txBody>
-                    <a:bodyPr/>
-                    <a:lstStyle/>
-                    <a:p>
-                      <a:r>
-                        <a:rPr lang="ru-RU" sz="1200"/>
-                        <a:t>Низкая (~100 руб. за пакет)</a:t>
-                      </a:r>
-                    </a:p>
-                  </a:txBody>
-                  <a:tcPr marL="35667" marR="35667" marT="17833" marB="17833" anchor="ctr"/>
-                </a:tc>
-                <a:tc>
-                  <a:txBody>
-                    <a:bodyPr/>
-                    <a:lstStyle/>
-                    <a:p>
-                      <a:r>
-                        <a:rPr lang="ru-RU" sz="1200"/>
-                        <a:t>Средняя (от 300 руб.)</a:t>
-                      </a:r>
-                    </a:p>
-                  </a:txBody>
-                  <a:tcPr marL="35667" marR="35667" marT="17833" marB="17833" anchor="ctr"/>
-                </a:tc>
-                <a:tc>
-                  <a:txBody>
-                    <a:bodyPr/>
-                    <a:lstStyle/>
-                    <a:p>
-                      <a:r>
-                        <a:rPr lang="ru-RU" sz="1200"/>
-                        <a:t>Высокая (от 500 руб.)</a:t>
-                      </a:r>
-                    </a:p>
-                  </a:txBody>
-                  <a:tcPr marL="35667" marR="35667" marT="17833" marB="17833" anchor="ctr"/>
-                </a:tc>
-                <a:tc>
-                  <a:txBody>
-                    <a:bodyPr/>
-                    <a:lstStyle/>
-                    <a:p>
-                      <a:r>
-                        <a:rPr lang="ru-RU" sz="1200"/>
-                        <a:t>Очень высокая (от 1500 руб.)</a:t>
-                      </a:r>
-                    </a:p>
-                  </a:txBody>
-                  <a:tcPr marL="35667" marR="35667" marT="17833" marB="17833" anchor="ctr"/>
-                </a:tc>
-                <a:tc>
-                  <a:txBody>
-                    <a:bodyPr/>
-                    <a:lstStyle/>
-                    <a:p>
-                      <a:r>
-                        <a:rPr lang="ru-RU" sz="1200" dirty="0"/>
-                        <a:t>Бесплатно или символически</a:t>
-                      </a:r>
-                    </a:p>
-                  </a:txBody>
-                  <a:tcPr marL="35667" marR="35667" marT="17833" marB="17833" anchor="ctr"/>
-                </a:tc>
-                <a:extLst>
-                  <a:ext uri="{0D108BD9-81ED-4DB2-BD59-A6C34878D82A}">
-                    <a16:rowId xmlns:a16="http://schemas.microsoft.com/office/drawing/2014/main" val="2452242638"/>
-                  </a:ext>
-                </a:extLst>
-              </a:tr>
-              <a:tr h="352026">
-                <a:tc>
-                  <a:txBody>
-                    <a:bodyPr/>
-                    <a:lstStyle/>
-                    <a:p>
-                      <a:r>
-                        <a:rPr lang="ru-RU" sz="1200" b="1"/>
-                        <a:t>Комиссия платформы</a:t>
-                      </a:r>
-                      <a:endParaRPr lang="ru-RU" sz="1200"/>
-                    </a:p>
-                  </a:txBody>
-                  <a:tcPr marL="35667" marR="35667" marT="17833" marB="17833" anchor="ctr"/>
-                </a:tc>
-                <a:tc>
-                  <a:txBody>
-                    <a:bodyPr/>
-                    <a:lstStyle/>
-                    <a:p>
-                      <a:r>
-                        <a:rPr lang="ru-RU" sz="1200" dirty="0"/>
-                        <a:t>20% с заказа</a:t>
-                      </a:r>
-                    </a:p>
-                  </a:txBody>
-                  <a:tcPr marL="35667" marR="35667" marT="17833" marB="17833" anchor="ctr"/>
-                </a:tc>
-                <a:tc>
-                  <a:txBody>
-                    <a:bodyPr/>
-                    <a:lstStyle/>
-                    <a:p>
-                      <a:r>
-                        <a:rPr lang="ru-RU" sz="1200"/>
-                        <a:t>Не применимо</a:t>
-                      </a:r>
-                    </a:p>
-                  </a:txBody>
-                  <a:tcPr marL="35667" marR="35667" marT="17833" marB="17833" anchor="ctr"/>
-                </a:tc>
-                <a:tc>
-                  <a:txBody>
-                    <a:bodyPr/>
-                    <a:lstStyle/>
-                    <a:p>
-                      <a:r>
-                        <a:rPr lang="ru-RU" sz="1200"/>
-                        <a:t>Не применимо</a:t>
-                      </a:r>
-                    </a:p>
-                  </a:txBody>
-                  <a:tcPr marL="35667" marR="35667" marT="17833" marB="17833" anchor="ctr"/>
-                </a:tc>
-                <a:tc>
-                  <a:txBody>
-                    <a:bodyPr/>
-                    <a:lstStyle/>
-                    <a:p>
-                      <a:r>
-                        <a:rPr lang="ru-RU" sz="1200"/>
-                        <a:t>Не применимо</a:t>
-                      </a:r>
-                    </a:p>
-                  </a:txBody>
-                  <a:tcPr marL="35667" marR="35667" marT="17833" marB="17833" anchor="ctr"/>
-                </a:tc>
-                <a:tc>
-                  <a:txBody>
-                    <a:bodyPr/>
-                    <a:lstStyle/>
-                    <a:p>
-                      <a:r>
-                        <a:rPr lang="ru-RU" sz="1200"/>
-                        <a:t>Отсутствует</a:t>
-                      </a:r>
-                    </a:p>
-                  </a:txBody>
-                  <a:tcPr marL="35667" marR="35667" marT="17833" marB="17833" anchor="ctr"/>
-                </a:tc>
-                <a:extLst>
-                  <a:ext uri="{0D108BD9-81ED-4DB2-BD59-A6C34878D82A}">
-                    <a16:rowId xmlns:a16="http://schemas.microsoft.com/office/drawing/2014/main" val="2518956855"/>
-                  </a:ext>
-                </a:extLst>
-              </a:tr>
-              <a:tr h="371882">
-                <a:tc>
-                  <a:txBody>
-                    <a:bodyPr/>
-                    <a:lstStyle/>
-                    <a:p>
-                      <a:r>
-                        <a:rPr lang="ru-RU" sz="1200" b="1"/>
-                        <a:t>Скорость выполнения</a:t>
-                      </a:r>
-                      <a:endParaRPr lang="ru-RU" sz="1200"/>
-                    </a:p>
-                  </a:txBody>
-                  <a:tcPr marL="35667" marR="35667" marT="17833" marB="17833" anchor="ctr"/>
-                </a:tc>
-                <a:tc>
-                  <a:txBody>
-                    <a:bodyPr/>
-                    <a:lstStyle/>
-                    <a:p>
-                      <a:r>
-                        <a:rPr lang="ru-RU" sz="1200"/>
-                        <a:t>Мгновенно (исполнитель в доме)</a:t>
-                      </a:r>
-                    </a:p>
-                  </a:txBody>
-                  <a:tcPr marL="35667" marR="35667" marT="17833" marB="17833" anchor="ctr"/>
-                </a:tc>
-                <a:tc>
-                  <a:txBody>
-                    <a:bodyPr/>
-                    <a:lstStyle/>
-                    <a:p>
-                      <a:r>
-                        <a:rPr lang="ru-RU" sz="1200"/>
-                        <a:t>1–3 часа</a:t>
-                      </a:r>
-                    </a:p>
-                  </a:txBody>
-                  <a:tcPr marL="35667" marR="35667" marT="17833" marB="17833" anchor="ctr"/>
-                </a:tc>
-                <a:tc>
-                  <a:txBody>
-                    <a:bodyPr/>
-                    <a:lstStyle/>
-                    <a:p>
-                      <a:r>
-                        <a:rPr lang="ru-RU" sz="1200"/>
-                        <a:t>По расписанию</a:t>
-                      </a:r>
-                    </a:p>
-                  </a:txBody>
-                  <a:tcPr marL="35667" marR="35667" marT="17833" marB="17833" anchor="ctr"/>
-                </a:tc>
-                <a:tc>
-                  <a:txBody>
-                    <a:bodyPr/>
-                    <a:lstStyle/>
-                    <a:p>
-                      <a:r>
-                        <a:rPr lang="ru-RU" sz="1200"/>
-                        <a:t>Долго (под заказ)</a:t>
-                      </a:r>
-                    </a:p>
-                  </a:txBody>
-                  <a:tcPr marL="35667" marR="35667" marT="17833" marB="17833" anchor="ctr"/>
-                </a:tc>
-                <a:tc>
-                  <a:txBody>
-                    <a:bodyPr/>
-                    <a:lstStyle/>
-                    <a:p>
-                      <a:r>
-                        <a:rPr lang="ru-RU" sz="1200"/>
-                        <a:t>Зависит от волонтёров</a:t>
-                      </a:r>
-                    </a:p>
-                  </a:txBody>
-                  <a:tcPr marL="35667" marR="35667" marT="17833" marB="17833" anchor="ctr"/>
-                </a:tc>
-                <a:extLst>
-                  <a:ext uri="{0D108BD9-81ED-4DB2-BD59-A6C34878D82A}">
-                    <a16:rowId xmlns:a16="http://schemas.microsoft.com/office/drawing/2014/main" val="206686353"/>
-                  </a:ext>
-                </a:extLst>
-              </a:tr>
-              <a:tr h="514463">
-                <a:tc>
-                  <a:txBody>
-                    <a:bodyPr/>
-                    <a:lstStyle/>
-                    <a:p>
-                      <a:r>
-                        <a:rPr lang="ru-RU" sz="1200" b="1"/>
-                        <a:t>Мобильное приложение</a:t>
-                      </a:r>
-                      <a:endParaRPr lang="ru-RU" sz="1200"/>
-                    </a:p>
-                  </a:txBody>
-                  <a:tcPr marL="35667" marR="35667" marT="17833" marB="17833" anchor="ctr"/>
-                </a:tc>
-                <a:tc>
-                  <a:txBody>
-                    <a:bodyPr/>
-                    <a:lstStyle/>
-                    <a:p>
-                      <a:r>
-                        <a:rPr lang="en-US" sz="1200"/>
-                        <a:t>Telegram-</a:t>
-                      </a:r>
-                      <a:r>
-                        <a:rPr lang="ru-RU" sz="1200"/>
-                        <a:t>бот (кросс-платформа)</a:t>
-                      </a:r>
-                    </a:p>
-                  </a:txBody>
-                  <a:tcPr marL="35667" marR="35667" marT="17833" marB="17833" anchor="ctr"/>
-                </a:tc>
-                <a:tc>
-                  <a:txBody>
-                    <a:bodyPr/>
-                    <a:lstStyle/>
-                    <a:p>
-                      <a:r>
-                        <a:rPr lang="ru-RU" sz="1200"/>
-                        <a:t>Собственное мобильное приложение</a:t>
-                      </a:r>
-                    </a:p>
-                  </a:txBody>
-                  <a:tcPr marL="35667" marR="35667" marT="17833" marB="17833" anchor="ctr"/>
-                </a:tc>
-                <a:tc>
-                  <a:txBody>
-                    <a:bodyPr/>
-                    <a:lstStyle/>
-                    <a:p>
-                      <a:r>
-                        <a:rPr lang="ru-RU" sz="1200"/>
-                        <a:t>Собственное приложение</a:t>
-                      </a:r>
-                    </a:p>
-                  </a:txBody>
-                  <a:tcPr marL="35667" marR="35667" marT="17833" marB="17833" anchor="ctr"/>
-                </a:tc>
-                <a:tc>
-                  <a:txBody>
-                    <a:bodyPr/>
-                    <a:lstStyle/>
-                    <a:p>
-                      <a:r>
-                        <a:rPr lang="ru-RU" sz="1200"/>
-                        <a:t>Веб-портал</a:t>
-                      </a:r>
-                    </a:p>
-                  </a:txBody>
-                  <a:tcPr marL="35667" marR="35667" marT="17833" marB="17833" anchor="ctr"/>
-                </a:tc>
-                <a:tc>
-                  <a:txBody>
-                    <a:bodyPr/>
-                    <a:lstStyle/>
-                    <a:p>
-                      <a:r>
-                        <a:rPr lang="ru-RU" sz="1200"/>
-                        <a:t>Чаты в соцсетях</a:t>
-                      </a:r>
-                    </a:p>
-                  </a:txBody>
-                  <a:tcPr marL="35667" marR="35667" marT="17833" marB="17833" anchor="ctr"/>
-                </a:tc>
-                <a:extLst>
-                  <a:ext uri="{0D108BD9-81ED-4DB2-BD59-A6C34878D82A}">
-                    <a16:rowId xmlns:a16="http://schemas.microsoft.com/office/drawing/2014/main" val="2044330173"/>
-                  </a:ext>
-                </a:extLst>
-              </a:tr>
-              <a:tr h="352026">
-                <a:tc>
-                  <a:txBody>
-                    <a:bodyPr/>
-                    <a:lstStyle/>
-                    <a:p>
-                      <a:r>
-                        <a:rPr lang="ru-RU" sz="1200" b="1"/>
-                        <a:t>Главное УТП</a:t>
-                      </a:r>
-                      <a:endParaRPr lang="ru-RU" sz="1200"/>
-                    </a:p>
-                  </a:txBody>
-                  <a:tcPr marL="35667" marR="35667" marT="17833" marB="17833" anchor="ctr"/>
-                </a:tc>
-                <a:tc>
-                  <a:txBody>
-                    <a:bodyPr/>
-                    <a:lstStyle/>
-                    <a:p>
-                      <a:r>
-                        <a:rPr lang="ru-RU" sz="1200"/>
-                        <a:t>Самая низкая цена + мгновенность</a:t>
-                      </a:r>
-                    </a:p>
-                  </a:txBody>
-                  <a:tcPr marL="35667" marR="35667" marT="17833" marB="17833" anchor="ctr"/>
-                </a:tc>
-                <a:tc>
-                  <a:txBody>
-                    <a:bodyPr/>
-                    <a:lstStyle/>
-                    <a:p>
-                      <a:r>
-                        <a:rPr lang="ru-RU" sz="1200"/>
-                        <a:t>Широкая география</a:t>
-                      </a:r>
-                    </a:p>
-                  </a:txBody>
-                  <a:tcPr marL="35667" marR="35667" marT="17833" marB="17833" anchor="ctr"/>
-                </a:tc>
-                <a:tc>
-                  <a:txBody>
-                    <a:bodyPr/>
-                    <a:lstStyle/>
-                    <a:p>
-                      <a:r>
-                        <a:rPr lang="ru-RU" sz="1200"/>
-                        <a:t>Юридическая чистота</a:t>
-                      </a:r>
-                    </a:p>
-                  </a:txBody>
-                  <a:tcPr marL="35667" marR="35667" marT="17833" marB="17833" anchor="ctr"/>
-                </a:tc>
-                <a:tc>
-                  <a:txBody>
-                    <a:bodyPr/>
-                    <a:lstStyle/>
-                    <a:p>
-                      <a:r>
-                        <a:rPr lang="ru-RU" sz="1200"/>
-                        <a:t>Работа с крупными объёмами</a:t>
-                      </a:r>
-                    </a:p>
-                  </a:txBody>
-                  <a:tcPr marL="35667" marR="35667" marT="17833" marB="17833" anchor="ctr"/>
-                </a:tc>
-                <a:tc>
-                  <a:txBody>
-                    <a:bodyPr/>
-                    <a:lstStyle/>
-                    <a:p>
-                      <a:r>
-                        <a:rPr lang="ru-RU" sz="1200"/>
-                        <a:t>Экологическая миссия</a:t>
-                      </a:r>
-                    </a:p>
-                  </a:txBody>
-                  <a:tcPr marL="35667" marR="35667" marT="17833" marB="17833" anchor="ctr"/>
-                </a:tc>
-                <a:extLst>
-                  <a:ext uri="{0D108BD9-81ED-4DB2-BD59-A6C34878D82A}">
-                    <a16:rowId xmlns:a16="http://schemas.microsoft.com/office/drawing/2014/main" val="3227704977"/>
-                  </a:ext>
-                </a:extLst>
-              </a:tr>
-              <a:tr h="514463">
-                <a:tc>
-                  <a:txBody>
-                    <a:bodyPr/>
-                    <a:lstStyle/>
-                    <a:p>
-                      <a:r>
-                        <a:rPr lang="ru-RU" sz="1200" b="1"/>
-                        <a:t>Юридические риски</a:t>
-                      </a:r>
-                      <a:endParaRPr lang="ru-RU" sz="1200"/>
-                    </a:p>
-                  </a:txBody>
-                  <a:tcPr marL="35667" marR="35667" marT="17833" marB="17833" anchor="ctr"/>
-                </a:tc>
-                <a:tc>
-                  <a:txBody>
-                    <a:bodyPr/>
-                    <a:lstStyle/>
-                    <a:p>
-                      <a:r>
-                        <a:rPr lang="ru-RU" sz="1200"/>
-                        <a:t>Средние (детский труд, ответственность)</a:t>
-                      </a:r>
-                    </a:p>
-                  </a:txBody>
-                  <a:tcPr marL="35667" marR="35667" marT="17833" marB="17833" anchor="ctr"/>
-                </a:tc>
-                <a:tc>
-                  <a:txBody>
-                    <a:bodyPr/>
-                    <a:lstStyle/>
-                    <a:p>
-                      <a:r>
-                        <a:rPr lang="ru-RU" sz="1200"/>
-                        <a:t>Минимальные</a:t>
-                      </a:r>
-                    </a:p>
-                  </a:txBody>
-                  <a:tcPr marL="35667" marR="35667" marT="17833" marB="17833" anchor="ctr"/>
-                </a:tc>
-                <a:tc>
-                  <a:txBody>
-                    <a:bodyPr/>
-                    <a:lstStyle/>
-                    <a:p>
-                      <a:r>
-                        <a:rPr lang="ru-RU" sz="1200"/>
-                        <a:t>Минимальные</a:t>
-                      </a:r>
-                    </a:p>
-                  </a:txBody>
-                  <a:tcPr marL="35667" marR="35667" marT="17833" marB="17833" anchor="ctr"/>
-                </a:tc>
-                <a:tc>
-                  <a:txBody>
-                    <a:bodyPr/>
-                    <a:lstStyle/>
-                    <a:p>
-                      <a:r>
-                        <a:rPr lang="ru-RU" sz="1200"/>
-                        <a:t>Средние (лицензии на отходы)</a:t>
-                      </a:r>
-                    </a:p>
-                  </a:txBody>
-                  <a:tcPr marL="35667" marR="35667" marT="17833" marB="17833" anchor="ctr"/>
-                </a:tc>
-                <a:tc>
-                  <a:txBody>
-                    <a:bodyPr/>
-                    <a:lstStyle/>
-                    <a:p>
-                      <a:r>
-                        <a:rPr lang="ru-RU" sz="1200" dirty="0"/>
-                        <a:t>Низкие (некоммерческий статус)</a:t>
-                      </a:r>
-                    </a:p>
-                  </a:txBody>
-                  <a:tcPr marL="35667" marR="35667" marT="17833" marB="17833" anchor="ctr"/>
-                </a:tc>
-                <a:extLst>
-                  <a:ext uri="{0D108BD9-81ED-4DB2-BD59-A6C34878D82A}">
-                    <a16:rowId xmlns:a16="http://schemas.microsoft.com/office/drawing/2014/main" val="1554636659"/>
-                  </a:ext>
-                </a:extLst>
-              </a:tr>
-              <a:tr h="514463">
-                <a:tc>
-                  <a:txBody>
-                    <a:bodyPr/>
-                    <a:lstStyle/>
-                    <a:p>
-                      <a:r>
-                        <a:rPr lang="ru-RU" sz="1200" b="1"/>
-                        <a:t>Потенциал масштабирования</a:t>
-                      </a:r>
-                      <a:endParaRPr lang="ru-RU" sz="1200"/>
-                    </a:p>
-                  </a:txBody>
-                  <a:tcPr marL="35667" marR="35667" marT="17833" marB="17833" anchor="ctr"/>
-                </a:tc>
-                <a:tc>
-                  <a:txBody>
-                    <a:bodyPr/>
-                    <a:lstStyle/>
-                    <a:p>
-                      <a:r>
-                        <a:rPr lang="ru-RU" sz="1200"/>
-                        <a:t>Высокий (эффект сети, низкий порог входа)</a:t>
-                      </a:r>
-                    </a:p>
-                  </a:txBody>
-                  <a:tcPr marL="35667" marR="35667" marT="17833" marB="17833" anchor="ctr"/>
-                </a:tc>
-                <a:tc>
-                  <a:txBody>
-                    <a:bodyPr/>
-                    <a:lstStyle/>
-                    <a:p>
-                      <a:r>
-                        <a:rPr lang="ru-RU" sz="1200"/>
-                        <a:t>Средний</a:t>
-                      </a:r>
-                    </a:p>
-                  </a:txBody>
-                  <a:tcPr marL="35667" marR="35667" marT="17833" marB="17833" anchor="ctr"/>
-                </a:tc>
-                <a:tc>
-                  <a:txBody>
-                    <a:bodyPr/>
-                    <a:lstStyle/>
-                    <a:p>
-                      <a:r>
-                        <a:rPr lang="ru-RU" sz="1200"/>
-                        <a:t>Низкий (высокие издержки)</a:t>
-                      </a:r>
-                    </a:p>
-                  </a:txBody>
-                  <a:tcPr marL="35667" marR="35667" marT="17833" marB="17833" anchor="ctr"/>
-                </a:tc>
-                <a:tc>
-                  <a:txBody>
-                    <a:bodyPr/>
-                    <a:lstStyle/>
-                    <a:p>
-                      <a:r>
-                        <a:rPr lang="ru-RU" sz="1200"/>
-                        <a:t>Низкий (</a:t>
-                      </a:r>
-                      <a:r>
-                        <a:rPr lang="en-US" sz="1200"/>
-                        <a:t>B2B)</a:t>
-                      </a:r>
-                    </a:p>
-                  </a:txBody>
-                  <a:tcPr marL="35667" marR="35667" marT="17833" marB="17833" anchor="ctr"/>
-                </a:tc>
-                <a:tc>
-                  <a:txBody>
-                    <a:bodyPr/>
-                    <a:lstStyle/>
-                    <a:p>
-                      <a:r>
-                        <a:rPr lang="ru-RU" sz="1200" dirty="0"/>
-                        <a:t>Низкий (нет дохода)</a:t>
-                      </a:r>
-                    </a:p>
-                  </a:txBody>
-                  <a:tcPr marL="35667" marR="35667" marT="17833" marB="17833" anchor="ctr"/>
-                </a:tc>
-                <a:extLst>
-                  <a:ext uri="{0D108BD9-81ED-4DB2-BD59-A6C34878D82A}">
-                    <a16:rowId xmlns:a16="http://schemas.microsoft.com/office/drawing/2014/main" val="1055664462"/>
-                  </a:ext>
-                </a:extLst>
-              </a:tr>
-            </a:tbl>
-          </a:graphicData>
-        </a:graphic>
-      </p:graphicFrame>
+              <a:t>Сезонность</a:t>
+            </a:r>
+          </a:p>
+        </p:txBody>
+      </p:sp>
+      <p:sp>
+        <p:nvSpPr>
+          <p:cNvPr id="3" name="Объект 2">
+            <a:extLst>
+              <a:ext uri="{FF2B5EF4-FFF2-40B4-BE49-F238E27FC236}">
+                <a16:creationId xmlns:a16="http://schemas.microsoft.com/office/drawing/2014/main" id="{D1990373-E690-9C53-1B64-35C62D156343}"/>
+              </a:ext>
+            </a:extLst>
+          </p:cNvPr>
+          <p:cNvSpPr>
+            <a:spLocks noGrp="1"/>
+          </p:cNvSpPr>
+          <p:nvPr>
+            <p:ph idx="1"/>
+          </p:nvPr>
+        </p:nvSpPr>
+        <p:spPr>
+          <a:xfrm>
+            <a:off x="838200" y="1825625"/>
+            <a:ext cx="5257800" cy="4351338"/>
+          </a:xfrm>
+        </p:spPr>
+        <p:txBody>
+          <a:bodyPr>
+            <a:normAutofit/>
+          </a:bodyPr>
+          <a:lstStyle/>
+          <a:p>
+            <a:r>
+              <a:rPr lang="ru-RU" dirty="0"/>
+              <a:t>Лето - пиковый сезон для сервиса: у школьников каникулы (больше времени для работы), а сезон отпусков и ремонтов увеличивает спрос на вывоз мусора.</a:t>
+            </a:r>
+          </a:p>
+        </p:txBody>
+      </p:sp>
+      <p:pic>
+        <p:nvPicPr>
+          <p:cNvPr id="4" name="Рисунок 3">
+            <a:extLst>
+              <a:ext uri="{FF2B5EF4-FFF2-40B4-BE49-F238E27FC236}">
+                <a16:creationId xmlns:a16="http://schemas.microsoft.com/office/drawing/2014/main" id="{DC2C68A6-18A4-D841-5EE0-44335084542E}"/>
+              </a:ext>
+            </a:extLst>
+          </p:cNvPr>
+          <p:cNvPicPr>
+            <a:picLocks noChangeAspect="1"/>
+          </p:cNvPicPr>
+          <p:nvPr/>
+        </p:nvPicPr>
+        <p:blipFill>
+          <a:blip r:embed="rId2"/>
+          <a:stretch>
+            <a:fillRect/>
+          </a:stretch>
+        </p:blipFill>
+        <p:spPr>
+          <a:xfrm>
+            <a:off x="6763114" y="1825625"/>
+            <a:ext cx="4590686" cy="3353091"/>
+          </a:xfrm>
+          <a:prstGeom prst="rect">
+            <a:avLst/>
+          </a:prstGeom>
+        </p:spPr>
+      </p:pic>
     </p:spTree>
     <p:extLst>
       <p:ext uri="{BB962C8B-B14F-4D97-AF65-F5344CB8AC3E}">
-        <p14:creationId xmlns:p14="http://schemas.microsoft.com/office/powerpoint/2010/main" val="2577597527"/>
+        <p14:creationId xmlns:p14="http://schemas.microsoft.com/office/powerpoint/2010/main" val="3704205432"/>
       </p:ext>
     </p:extLst>
   </p:cSld>
@@ -5034,6 +4834,606 @@
           <p:cNvPr id="2" name="Заголовок 1">
             <a:extLst>
               <a:ext uri="{FF2B5EF4-FFF2-40B4-BE49-F238E27FC236}">
+                <a16:creationId xmlns:a16="http://schemas.microsoft.com/office/drawing/2014/main" id="{0715F0C1-8D91-CA0D-4C00-010D8D7069A9}"/>
+              </a:ext>
+            </a:extLst>
+          </p:cNvPr>
+          <p:cNvSpPr>
+            <a:spLocks noGrp="1"/>
+          </p:cNvSpPr>
+          <p:nvPr>
+            <p:ph type="title"/>
+          </p:nvPr>
+        </p:nvSpPr>
+        <p:spPr/>
+        <p:txBody>
+          <a:bodyPr/>
+          <a:lstStyle/>
+          <a:p>
+            <a:r>
+              <a:rPr lang="ru-RU" dirty="0"/>
+              <a:t>Конкурентный анализ</a:t>
+            </a:r>
+          </a:p>
+        </p:txBody>
+      </p:sp>
+      <p:graphicFrame>
+        <p:nvGraphicFramePr>
+          <p:cNvPr id="5" name="Таблица 4">
+            <a:extLst>
+              <a:ext uri="{FF2B5EF4-FFF2-40B4-BE49-F238E27FC236}">
+                <a16:creationId xmlns:a16="http://schemas.microsoft.com/office/drawing/2014/main" id="{BB36DCFB-6536-0286-3BF9-F1EF81959F81}"/>
+              </a:ext>
+            </a:extLst>
+          </p:cNvPr>
+          <p:cNvGraphicFramePr>
+            <a:graphicFrameLocks noGrp="1"/>
+          </p:cNvGraphicFramePr>
+          <p:nvPr>
+            <p:extLst>
+              <p:ext uri="{D42A27DB-BD31-4B8C-83A1-F6EECF244321}">
+                <p14:modId xmlns:p14="http://schemas.microsoft.com/office/powerpoint/2010/main" val="1042364018"/>
+              </p:ext>
+            </p:extLst>
+          </p:nvPr>
+        </p:nvGraphicFramePr>
+        <p:xfrm>
+          <a:off x="838199" y="1352939"/>
+          <a:ext cx="10890381" cy="5194625"/>
+        </p:xfrm>
+        <a:graphic>
+          <a:graphicData uri="http://schemas.openxmlformats.org/drawingml/2006/table">
+            <a:tbl>
+              <a:tblPr>
+                <a:tableStyleId>{3C2FFA5D-87B4-456A-9821-1D502468CF0F}</a:tableStyleId>
+              </a:tblPr>
+              <a:tblGrid>
+                <a:gridCol w="1866129">
+                  <a:extLst>
+                    <a:ext uri="{9D8B030D-6E8A-4147-A177-3AD203B41FA5}">
+                      <a16:colId xmlns:a16="http://schemas.microsoft.com/office/drawing/2014/main" val="812569972"/>
+                    </a:ext>
+                  </a:extLst>
+                </a:gridCol>
+                <a:gridCol w="2256063">
+                  <a:extLst>
+                    <a:ext uri="{9D8B030D-6E8A-4147-A177-3AD203B41FA5}">
+                      <a16:colId xmlns:a16="http://schemas.microsoft.com/office/drawing/2014/main" val="4120129658"/>
+                    </a:ext>
+                  </a:extLst>
+                </a:gridCol>
+                <a:gridCol w="2256063">
+                  <a:extLst>
+                    <a:ext uri="{9D8B030D-6E8A-4147-A177-3AD203B41FA5}">
+                      <a16:colId xmlns:a16="http://schemas.microsoft.com/office/drawing/2014/main" val="1201958830"/>
+                    </a:ext>
+                  </a:extLst>
+                </a:gridCol>
+                <a:gridCol w="2256063">
+                  <a:extLst>
+                    <a:ext uri="{9D8B030D-6E8A-4147-A177-3AD203B41FA5}">
+                      <a16:colId xmlns:a16="http://schemas.microsoft.com/office/drawing/2014/main" val="3572462965"/>
+                    </a:ext>
+                  </a:extLst>
+                </a:gridCol>
+                <a:gridCol w="2256063">
+                  <a:extLst>
+                    <a:ext uri="{9D8B030D-6E8A-4147-A177-3AD203B41FA5}">
+                      <a16:colId xmlns:a16="http://schemas.microsoft.com/office/drawing/2014/main" val="519290226"/>
+                    </a:ext>
+                  </a:extLst>
+                </a:gridCol>
+              </a:tblGrid>
+              <a:tr h="674838">
+                <a:tc>
+                  <a:txBody>
+                    <a:bodyPr/>
+                    <a:lstStyle/>
+                    <a:p>
+                      <a:r>
+                        <a:rPr lang="ru-RU" sz="1800" dirty="0"/>
+                        <a:t>Критерий</a:t>
+                      </a:r>
+                    </a:p>
+                  </a:txBody>
+                  <a:tcPr marL="35667" marR="35667" marT="17833" marB="17833" anchor="ctr"/>
+                </a:tc>
+                <a:tc>
+                  <a:txBody>
+                    <a:bodyPr/>
+                    <a:lstStyle/>
+                    <a:p>
+                      <a:r>
+                        <a:rPr lang="en-US" sz="1800" b="1"/>
+                        <a:t>TrashOut</a:t>
+                      </a:r>
+                      <a:endParaRPr lang="en-US" sz="1800"/>
+                    </a:p>
+                  </a:txBody>
+                  <a:tcPr marL="35667" marR="35667" marT="17833" marB="17833" anchor="ctr"/>
+                </a:tc>
+                <a:tc>
+                  <a:txBody>
+                    <a:bodyPr/>
+                    <a:lstStyle/>
+                    <a:p>
+                      <a:r>
+                        <a:rPr lang="ru-RU" sz="1800"/>
+                        <a:t>МусорОФФ</a:t>
+                      </a:r>
+                    </a:p>
+                  </a:txBody>
+                  <a:tcPr marL="35667" marR="35667" marT="17833" marB="17833" anchor="ctr"/>
+                </a:tc>
+                <a:tc>
+                  <a:txBody>
+                    <a:bodyPr/>
+                    <a:lstStyle/>
+                    <a:p>
+                      <a:r>
+                        <a:rPr lang="ru-RU" sz="1800"/>
+                        <a:t>Убиратор</a:t>
+                      </a:r>
+                    </a:p>
+                  </a:txBody>
+                  <a:tcPr marL="35667" marR="35667" marT="17833" marB="17833" anchor="ctr"/>
+                </a:tc>
+                <a:tc>
+                  <a:txBody>
+                    <a:bodyPr/>
+                    <a:lstStyle/>
+                    <a:p>
+                      <a:r>
+                        <a:rPr lang="ru-RU" sz="1800" dirty="0" err="1"/>
+                        <a:t>Экологистика</a:t>
+                      </a:r>
+                      <a:r>
+                        <a:rPr lang="ru-RU" sz="1800" dirty="0"/>
+                        <a:t> / </a:t>
+                      </a:r>
+                      <a:r>
+                        <a:rPr lang="ru-RU" sz="1800" dirty="0" err="1"/>
+                        <a:t>Баласка</a:t>
+                      </a:r>
+                      <a:endParaRPr lang="ru-RU" sz="1800" dirty="0"/>
+                    </a:p>
+                  </a:txBody>
+                  <a:tcPr marL="35667" marR="35667" marT="17833" marB="17833" anchor="ctr"/>
+                </a:tc>
+                <a:extLst>
+                  <a:ext uri="{0D108BD9-81ED-4DB2-BD59-A6C34878D82A}">
+                    <a16:rowId xmlns:a16="http://schemas.microsoft.com/office/drawing/2014/main" val="1201525749"/>
+                  </a:ext>
+                </a:extLst>
+              </a:tr>
+              <a:tr h="1137936">
+                <a:tc>
+                  <a:txBody>
+                    <a:bodyPr/>
+                    <a:lstStyle/>
+                    <a:p>
+                      <a:r>
+                        <a:rPr lang="ru-RU" sz="1800" b="1"/>
+                        <a:t>Тип сервиса</a:t>
+                      </a:r>
+                      <a:endParaRPr lang="ru-RU" sz="1800"/>
+                    </a:p>
+                  </a:txBody>
+                  <a:tcPr marL="35667" marR="35667" marT="17833" marB="17833" anchor="ctr"/>
+                </a:tc>
+                <a:tc>
+                  <a:txBody>
+                    <a:bodyPr/>
+                    <a:lstStyle/>
+                    <a:p>
+                      <a:r>
+                        <a:rPr lang="ru-RU" sz="1800" dirty="0"/>
+                        <a:t>Агрегатор </a:t>
+                      </a:r>
+                      <a:r>
+                        <a:rPr lang="ru-RU" sz="1800" dirty="0" err="1"/>
+                        <a:t>микрозаказов</a:t>
+                      </a:r>
+                      <a:r>
+                        <a:rPr lang="ru-RU" sz="1800" dirty="0"/>
+                        <a:t> в </a:t>
+                      </a:r>
+                      <a:r>
+                        <a:rPr lang="en-US" sz="1800" dirty="0"/>
+                        <a:t>Telegram</a:t>
+                      </a:r>
+                    </a:p>
+                  </a:txBody>
+                  <a:tcPr marL="35667" marR="35667" marT="17833" marB="17833" anchor="ctr"/>
+                </a:tc>
+                <a:tc>
+                  <a:txBody>
+                    <a:bodyPr/>
+                    <a:lstStyle/>
+                    <a:p>
+                      <a:r>
+                        <a:rPr lang="ru-RU" sz="1800" dirty="0"/>
+                        <a:t>Вывоз мусора курьерами</a:t>
+                      </a:r>
+                    </a:p>
+                  </a:txBody>
+                  <a:tcPr marL="35667" marR="35667" marT="17833" marB="17833" anchor="ctr"/>
+                </a:tc>
+                <a:tc>
+                  <a:txBody>
+                    <a:bodyPr/>
+                    <a:lstStyle/>
+                    <a:p>
+                      <a:r>
+                        <a:rPr lang="en-US" sz="1800"/>
+                        <a:t>B2B/B2C </a:t>
+                      </a:r>
+                      <a:r>
+                        <a:rPr lang="ru-RU" sz="1800"/>
+                        <a:t>вывоз отходов</a:t>
+                      </a:r>
+                    </a:p>
+                  </a:txBody>
+                  <a:tcPr marL="35667" marR="35667" marT="17833" marB="17833" anchor="ctr"/>
+                </a:tc>
+                <a:tc>
+                  <a:txBody>
+                    <a:bodyPr/>
+                    <a:lstStyle/>
+                    <a:p>
+                      <a:r>
+                        <a:rPr lang="ru-RU" sz="1800" dirty="0"/>
+                        <a:t>Вывоз крупногабаритного и строительного мусора</a:t>
+                      </a:r>
+                    </a:p>
+                  </a:txBody>
+                  <a:tcPr marL="35667" marR="35667" marT="17833" marB="17833" anchor="ctr"/>
+                </a:tc>
+                <a:extLst>
+                  <a:ext uri="{0D108BD9-81ED-4DB2-BD59-A6C34878D82A}">
+                    <a16:rowId xmlns:a16="http://schemas.microsoft.com/office/drawing/2014/main" val="2909554502"/>
+                  </a:ext>
+                </a:extLst>
+              </a:tr>
+              <a:tr h="1078256">
+                <a:tc>
+                  <a:txBody>
+                    <a:bodyPr/>
+                    <a:lstStyle/>
+                    <a:p>
+                      <a:r>
+                        <a:rPr lang="ru-RU" sz="1800" b="1" dirty="0"/>
+                        <a:t>Целевая аудитория</a:t>
+                      </a:r>
+                      <a:endParaRPr lang="ru-RU" sz="1800" dirty="0"/>
+                    </a:p>
+                  </a:txBody>
+                  <a:tcPr marL="35667" marR="35667" marT="17833" marB="17833" anchor="ctr"/>
+                </a:tc>
+                <a:tc>
+                  <a:txBody>
+                    <a:bodyPr/>
+                    <a:lstStyle/>
+                    <a:p>
+                      <a:r>
+                        <a:rPr lang="ru-RU" sz="1800" dirty="0"/>
+                        <a:t>Жители многоквартирных домов (</a:t>
+                      </a:r>
+                      <a:r>
+                        <a:rPr lang="ru-RU" sz="1800" dirty="0" err="1"/>
+                        <a:t>микрозаказы</a:t>
+                      </a:r>
+                      <a:r>
+                        <a:rPr lang="ru-RU" sz="1800" dirty="0"/>
+                        <a:t>)</a:t>
+                      </a:r>
+                    </a:p>
+                  </a:txBody>
+                  <a:tcPr marL="35667" marR="35667" marT="17833" marB="17833" anchor="ctr"/>
+                </a:tc>
+                <a:tc>
+                  <a:txBody>
+                    <a:bodyPr/>
+                    <a:lstStyle/>
+                    <a:p>
+                      <a:r>
+                        <a:rPr lang="ru-RU" sz="1800"/>
+                        <a:t>Физлица, нуждающиеся в быстром вывозе</a:t>
+                      </a:r>
+                    </a:p>
+                  </a:txBody>
+                  <a:tcPr marL="35667" marR="35667" marT="17833" marB="17833" anchor="ctr"/>
+                </a:tc>
+                <a:tc>
+                  <a:txBody>
+                    <a:bodyPr/>
+                    <a:lstStyle/>
+                    <a:p>
+                      <a:r>
+                        <a:rPr lang="ru-RU" sz="1800" dirty="0"/>
+                        <a:t>Физлица, офисы</a:t>
+                      </a:r>
+                    </a:p>
+                  </a:txBody>
+                  <a:tcPr marL="35667" marR="35667" marT="17833" marB="17833" anchor="ctr"/>
+                </a:tc>
+                <a:tc>
+                  <a:txBody>
+                    <a:bodyPr/>
+                    <a:lstStyle/>
+                    <a:p>
+                      <a:r>
+                        <a:rPr lang="ru-RU" sz="1800"/>
+                        <a:t>Юридические лица, стройки</a:t>
+                      </a:r>
+                    </a:p>
+                  </a:txBody>
+                  <a:tcPr marL="35667" marR="35667" marT="17833" marB="17833" anchor="ctr"/>
+                </a:tc>
+                <a:extLst>
+                  <a:ext uri="{0D108BD9-81ED-4DB2-BD59-A6C34878D82A}">
+                    <a16:rowId xmlns:a16="http://schemas.microsoft.com/office/drawing/2014/main" val="2467197881"/>
+                  </a:ext>
+                </a:extLst>
+              </a:tr>
+              <a:tr h="674838">
+                <a:tc>
+                  <a:txBody>
+                    <a:bodyPr/>
+                    <a:lstStyle/>
+                    <a:p>
+                      <a:r>
+                        <a:rPr lang="ru-RU" sz="1800" b="1"/>
+                        <a:t>Стоимость для клиента</a:t>
+                      </a:r>
+                      <a:endParaRPr lang="ru-RU" sz="1800"/>
+                    </a:p>
+                  </a:txBody>
+                  <a:tcPr marL="35667" marR="35667" marT="17833" marB="17833" anchor="ctr"/>
+                </a:tc>
+                <a:tc>
+                  <a:txBody>
+                    <a:bodyPr/>
+                    <a:lstStyle/>
+                    <a:p>
+                      <a:r>
+                        <a:rPr lang="ru-RU" sz="1800"/>
+                        <a:t>Низкая (~100 руб. за пакет)</a:t>
+                      </a:r>
+                    </a:p>
+                  </a:txBody>
+                  <a:tcPr marL="35667" marR="35667" marT="17833" marB="17833" anchor="ctr"/>
+                </a:tc>
+                <a:tc>
+                  <a:txBody>
+                    <a:bodyPr/>
+                    <a:lstStyle/>
+                    <a:p>
+                      <a:r>
+                        <a:rPr lang="ru-RU" sz="1800" dirty="0"/>
+                        <a:t>Средняя (от 300 руб.)</a:t>
+                      </a:r>
+                    </a:p>
+                  </a:txBody>
+                  <a:tcPr marL="35667" marR="35667" marT="17833" marB="17833" anchor="ctr"/>
+                </a:tc>
+                <a:tc>
+                  <a:txBody>
+                    <a:bodyPr/>
+                    <a:lstStyle/>
+                    <a:p>
+                      <a:r>
+                        <a:rPr lang="ru-RU" sz="1800" dirty="0"/>
+                        <a:t>Высокая (от 500 руб.)</a:t>
+                      </a:r>
+                    </a:p>
+                  </a:txBody>
+                  <a:tcPr marL="35667" marR="35667" marT="17833" marB="17833" anchor="ctr"/>
+                </a:tc>
+                <a:tc>
+                  <a:txBody>
+                    <a:bodyPr/>
+                    <a:lstStyle/>
+                    <a:p>
+                      <a:r>
+                        <a:rPr lang="ru-RU" sz="1800"/>
+                        <a:t>Очень высокая (от 1500 руб.)</a:t>
+                      </a:r>
+                    </a:p>
+                  </a:txBody>
+                  <a:tcPr marL="35667" marR="35667" marT="17833" marB="17833" anchor="ctr"/>
+                </a:tc>
+                <a:extLst>
+                  <a:ext uri="{0D108BD9-81ED-4DB2-BD59-A6C34878D82A}">
+                    <a16:rowId xmlns:a16="http://schemas.microsoft.com/office/drawing/2014/main" val="2452242638"/>
+                  </a:ext>
+                </a:extLst>
+              </a:tr>
+              <a:tr h="591791">
+                <a:tc>
+                  <a:txBody>
+                    <a:bodyPr/>
+                    <a:lstStyle/>
+                    <a:p>
+                      <a:r>
+                        <a:rPr lang="ru-RU" sz="1800" b="1"/>
+                        <a:t>Комиссия платформы</a:t>
+                      </a:r>
+                      <a:endParaRPr lang="ru-RU" sz="1800"/>
+                    </a:p>
+                  </a:txBody>
+                  <a:tcPr marL="35667" marR="35667" marT="17833" marB="17833" anchor="ctr"/>
+                </a:tc>
+                <a:tc>
+                  <a:txBody>
+                    <a:bodyPr/>
+                    <a:lstStyle/>
+                    <a:p>
+                      <a:r>
+                        <a:rPr lang="ru-RU" sz="1800" dirty="0"/>
+                        <a:t>15% с заказа</a:t>
+                      </a:r>
+                    </a:p>
+                  </a:txBody>
+                  <a:tcPr marL="35667" marR="35667" marT="17833" marB="17833" anchor="ctr"/>
+                </a:tc>
+                <a:tc>
+                  <a:txBody>
+                    <a:bodyPr/>
+                    <a:lstStyle/>
+                    <a:p>
+                      <a:r>
+                        <a:rPr lang="ru-RU" sz="1800"/>
+                        <a:t>Не применимо</a:t>
+                      </a:r>
+                    </a:p>
+                  </a:txBody>
+                  <a:tcPr marL="35667" marR="35667" marT="17833" marB="17833" anchor="ctr"/>
+                </a:tc>
+                <a:tc>
+                  <a:txBody>
+                    <a:bodyPr/>
+                    <a:lstStyle/>
+                    <a:p>
+                      <a:r>
+                        <a:rPr lang="ru-RU" sz="1800"/>
+                        <a:t>Не применимо</a:t>
+                      </a:r>
+                    </a:p>
+                  </a:txBody>
+                  <a:tcPr marL="35667" marR="35667" marT="17833" marB="17833" anchor="ctr"/>
+                </a:tc>
+                <a:tc>
+                  <a:txBody>
+                    <a:bodyPr/>
+                    <a:lstStyle/>
+                    <a:p>
+                      <a:r>
+                        <a:rPr lang="ru-RU" sz="1800"/>
+                        <a:t>Не применимо</a:t>
+                      </a:r>
+                    </a:p>
+                  </a:txBody>
+                  <a:tcPr marL="35667" marR="35667" marT="17833" marB="17833" anchor="ctr"/>
+                </a:tc>
+                <a:extLst>
+                  <a:ext uri="{0D108BD9-81ED-4DB2-BD59-A6C34878D82A}">
+                    <a16:rowId xmlns:a16="http://schemas.microsoft.com/office/drawing/2014/main" val="2518956855"/>
+                  </a:ext>
+                </a:extLst>
+              </a:tr>
+              <a:tr h="982276">
+                <a:tc>
+                  <a:txBody>
+                    <a:bodyPr/>
+                    <a:lstStyle/>
+                    <a:p>
+                      <a:r>
+                        <a:rPr lang="ru-RU" sz="1800" b="1"/>
+                        <a:t>Юридические риски</a:t>
+                      </a:r>
+                      <a:endParaRPr lang="ru-RU" sz="1800"/>
+                    </a:p>
+                  </a:txBody>
+                  <a:tcPr marL="35667" marR="35667" marT="17833" marB="17833" anchor="ctr"/>
+                </a:tc>
+                <a:tc>
+                  <a:txBody>
+                    <a:bodyPr/>
+                    <a:lstStyle/>
+                    <a:p>
+                      <a:r>
+                        <a:rPr lang="ru-RU" sz="1800"/>
+                        <a:t>Средние (детский труд, ответственность)</a:t>
+                      </a:r>
+                    </a:p>
+                  </a:txBody>
+                  <a:tcPr marL="35667" marR="35667" marT="17833" marB="17833" anchor="ctr"/>
+                </a:tc>
+                <a:tc>
+                  <a:txBody>
+                    <a:bodyPr/>
+                    <a:lstStyle/>
+                    <a:p>
+                      <a:r>
+                        <a:rPr lang="ru-RU" sz="1800" dirty="0"/>
+                        <a:t>Минимальные</a:t>
+                      </a:r>
+                    </a:p>
+                  </a:txBody>
+                  <a:tcPr marL="35667" marR="35667" marT="17833" marB="17833" anchor="ctr"/>
+                </a:tc>
+                <a:tc>
+                  <a:txBody>
+                    <a:bodyPr/>
+                    <a:lstStyle/>
+                    <a:p>
+                      <a:r>
+                        <a:rPr lang="ru-RU" sz="1800" dirty="0"/>
+                        <a:t>Минимальные</a:t>
+                      </a:r>
+                    </a:p>
+                  </a:txBody>
+                  <a:tcPr marL="35667" marR="35667" marT="17833" marB="17833" anchor="ctr"/>
+                </a:tc>
+                <a:tc>
+                  <a:txBody>
+                    <a:bodyPr/>
+                    <a:lstStyle/>
+                    <a:p>
+                      <a:r>
+                        <a:rPr lang="ru-RU" sz="1800" dirty="0"/>
+                        <a:t>Средние (лицензии на отходы)</a:t>
+                      </a:r>
+                    </a:p>
+                  </a:txBody>
+                  <a:tcPr marL="35667" marR="35667" marT="17833" marB="17833" anchor="ctr"/>
+                </a:tc>
+                <a:extLst>
+                  <a:ext uri="{0D108BD9-81ED-4DB2-BD59-A6C34878D82A}">
+                    <a16:rowId xmlns:a16="http://schemas.microsoft.com/office/drawing/2014/main" val="1554636659"/>
+                  </a:ext>
+                </a:extLst>
+              </a:tr>
+            </a:tbl>
+          </a:graphicData>
+        </a:graphic>
+      </p:graphicFrame>
+    </p:spTree>
+    <p:extLst>
+      <p:ext uri="{BB962C8B-B14F-4D97-AF65-F5344CB8AC3E}">
+        <p14:creationId xmlns:p14="http://schemas.microsoft.com/office/powerpoint/2010/main" val="2577597527"/>
+      </p:ext>
+    </p:extLst>
+  </p:cSld>
+  <p:clrMapOvr>
+    <a:masterClrMapping/>
+  </p:clrMapOvr>
+</p:sld>
+</file>
+
+<file path=ppt/slides/slide7.xml><?xml version="1.0" encoding="utf-8"?>
+<p:sld xmlns:a="http://schemas.openxmlformats.org/drawingml/2006/main" xmlns:r="http://schemas.openxmlformats.org/officeDocument/2006/relationships" xmlns:p="http://schemas.openxmlformats.org/presentationml/2006/main">
+  <p:cSld>
+    <p:spTree>
+      <p:nvGrpSpPr>
+        <p:cNvPr id="1" name=""/>
+        <p:cNvGrpSpPr/>
+        <p:nvPr/>
+      </p:nvGrpSpPr>
+      <p:grpSpPr>
+        <a:xfrm>
+          <a:off x="0" y="0"/>
+          <a:ext cx="0" cy="0"/>
+          <a:chOff x="0" y="0"/>
+          <a:chExt cx="0" cy="0"/>
+        </a:xfrm>
+      </p:grpSpPr>
+      <p:sp>
+        <p:nvSpPr>
+          <p:cNvPr id="2" name="Заголовок 1">
+            <a:extLst>
+              <a:ext uri="{FF2B5EF4-FFF2-40B4-BE49-F238E27FC236}">
                 <a16:creationId xmlns:a16="http://schemas.microsoft.com/office/drawing/2014/main" id="{C125C8EF-DBB8-F620-E011-2D0644E1A140}"/>
               </a:ext>
             </a:extLst>
@@ -5077,14 +5477,14 @@
             <p:ph idx="1"/>
             <p:extLst>
               <p:ext uri="{D42A27DB-BD31-4B8C-83A1-F6EECF244321}">
-                <p14:modId xmlns:p14="http://schemas.microsoft.com/office/powerpoint/2010/main" val="1349562898"/>
+                <p14:modId xmlns:p14="http://schemas.microsoft.com/office/powerpoint/2010/main" val="2002768909"/>
               </p:ext>
             </p:extLst>
           </p:nvPr>
         </p:nvGraphicFramePr>
         <p:xfrm>
           <a:off x="838199" y="1377755"/>
-          <a:ext cx="10787744" cy="5117914"/>
+          <a:ext cx="10787744" cy="5239834"/>
         </p:xfrm>
         <a:graphic>
           <a:graphicData uri="http://schemas.openxmlformats.org/drawingml/2006/table">
@@ -5115,10 +5515,10 @@
                     <a:lstStyle/>
                     <a:p>
                       <a:r>
-                        <a:rPr lang="ru-RU" sz="1400" b="1" dirty="0"/>
+                        <a:rPr lang="ru-RU" sz="1800" b="1" dirty="0"/>
                         <a:t>Сильные стороны </a:t>
                       </a:r>
-                      <a:endParaRPr lang="en-US" sz="1400" dirty="0"/>
+                      <a:endParaRPr lang="en-US" sz="1800" dirty="0"/>
                     </a:p>
                   </a:txBody>
                   <a:tcPr marL="57254" marR="57254" marT="28627" marB="28627" anchor="ctr"/>
@@ -5129,10 +5529,10 @@
                     <a:lstStyle/>
                     <a:p>
                       <a:r>
-                        <a:rPr lang="ru-RU" sz="1400" b="1" dirty="0"/>
+                        <a:rPr lang="ru-RU" sz="1800" b="1" dirty="0"/>
                         <a:t>Слабые стороны </a:t>
                       </a:r>
-                      <a:endParaRPr lang="en-US" sz="1400" dirty="0"/>
+                      <a:endParaRPr lang="en-US" sz="1800" dirty="0"/>
                     </a:p>
                   </a:txBody>
                   <a:tcPr marL="57254" marR="57254" marT="28627" marB="28627" anchor="ctr"/>
@@ -5150,43 +5550,29 @@
                     <a:lstStyle/>
                     <a:p>
                       <a:r>
-                        <a:rPr lang="ru-RU" sz="1400"/>
+                        <a:rPr lang="ru-RU" sz="1800" dirty="0"/>
                         <a:t>Самая низкая цена на рынке (≈100 руб. за пакет)</a:t>
                       </a:r>
                       <a:br>
-                        <a:rPr lang="ru-RU" sz="1400"/>
+                        <a:rPr lang="ru-RU" sz="1800" dirty="0"/>
                       </a:br>
                       <a:r>
-                        <a:rPr lang="ru-RU" sz="1400"/>
-                        <a:t>Мгновенное выполнение – исполнитель в том же доме/подъезде</a:t>
+                        <a:rPr lang="ru-RU" sz="1800" dirty="0"/>
+                        <a:t>Минимальные затраты на запуск и ежемесячное обслуживание</a:t>
                       </a:r>
                       <a:br>
-                        <a:rPr lang="ru-RU" sz="1400"/>
+                        <a:rPr lang="ru-RU" sz="1800" dirty="0"/>
                       </a:br>
                       <a:r>
-                        <a:rPr lang="ru-RU" sz="1400"/>
-                        <a:t>Минимальные затраты на запуск и ежемесячное обслуживание (Telegram‑бот, VPN)</a:t>
+                        <a:rPr lang="ru-RU" sz="1800" dirty="0"/>
+                        <a:t>Прозрачная комиссия 15%</a:t>
                       </a:r>
                       <a:br>
-                        <a:rPr lang="ru-RU" sz="1400"/>
+                        <a:rPr lang="ru-RU" sz="1800" dirty="0"/>
                       </a:br>
                       <a:r>
-                        <a:rPr lang="ru-RU" sz="1400"/>
-                        <a:t>Прозрачная комиссия 20%</a:t>
-                      </a:r>
-                      <a:br>
-                        <a:rPr lang="ru-RU" sz="1400"/>
-                      </a:br>
-                      <a:r>
-                        <a:rPr lang="ru-RU" sz="1400"/>
+                        <a:rPr lang="ru-RU" sz="1800" dirty="0"/>
                         <a:t>Простая логистика – не нужен автопарк или штатные курьеры</a:t>
-                      </a:r>
-                      <a:br>
-                        <a:rPr lang="ru-RU" sz="1400"/>
-                      </a:br>
-                      <a:r>
-                        <a:rPr lang="ru-RU" sz="1400"/>
-                        <a:t>Высокая маржинальность при масштабировании</a:t>
                       </a:r>
                     </a:p>
                   </a:txBody>
@@ -5198,43 +5584,36 @@
                     <a:lstStyle/>
                     <a:p>
                       <a:r>
-                        <a:rPr lang="ru-RU" sz="1400" dirty="0"/>
+                        <a:rPr lang="ru-RU" sz="1800" dirty="0"/>
                         <a:t>Зависимость от добросовестности и пунктуальности школьников</a:t>
                       </a:r>
                       <a:br>
-                        <a:rPr lang="ru-RU" sz="1400" dirty="0"/>
+                        <a:rPr lang="ru-RU" sz="1800" dirty="0"/>
                       </a:br>
                       <a:r>
-                        <a:rPr lang="ru-RU" sz="1400" dirty="0"/>
+                        <a:rPr lang="ru-RU" sz="1800" dirty="0"/>
                         <a:t>Работает только в светлое время суток и с учётом занятости детей</a:t>
                       </a:r>
                       <a:br>
-                        <a:rPr lang="ru-RU" sz="1400" dirty="0"/>
+                        <a:rPr lang="ru-RU" sz="1800" dirty="0"/>
                       </a:br>
                       <a:r>
-                        <a:rPr lang="ru-RU" sz="1400" dirty="0"/>
+                        <a:rPr lang="ru-RU" sz="1800" dirty="0"/>
                         <a:t>Нет собственного юридического лица или договоров страхования (на старте)</a:t>
                       </a:r>
                       <a:br>
-                        <a:rPr lang="ru-RU" sz="1400" dirty="0"/>
+                        <a:rPr lang="ru-RU" sz="1800" dirty="0"/>
                       </a:br>
                       <a:r>
-                        <a:rPr lang="ru-RU" sz="1400" dirty="0"/>
-                        <a:t>Ограниченная география – только густонаселённые районы (пока)</a:t>
-                      </a:r>
-                      <a:br>
-                        <a:rPr lang="ru-RU" sz="1400" dirty="0"/>
-                      </a:br>
-                      <a:r>
-                        <a:rPr lang="ru-RU" sz="1400" dirty="0"/>
+                        <a:rPr lang="ru-RU" sz="1800" dirty="0"/>
                         <a:t>Зависимость от </a:t>
                       </a:r>
                       <a:r>
-                        <a:rPr lang="ru-RU" sz="1400" dirty="0" err="1"/>
+                        <a:rPr lang="ru-RU" sz="1800" dirty="0" err="1"/>
                         <a:t>Telegram</a:t>
                       </a:r>
                       <a:r>
-                        <a:rPr lang="ru-RU" sz="1400" dirty="0"/>
+                        <a:rPr lang="ru-RU" sz="1800" dirty="0"/>
                         <a:t> и его доступности в РФ</a:t>
                       </a:r>
                     </a:p>
@@ -5254,10 +5633,10 @@
                     <a:lstStyle/>
                     <a:p>
                       <a:r>
-                        <a:rPr lang="ru-RU" sz="1400" b="1" dirty="0"/>
+                        <a:rPr lang="ru-RU" sz="1800" b="1" dirty="0"/>
                         <a:t>Возможности</a:t>
                       </a:r>
-                      <a:endParaRPr lang="en-US" sz="1400" dirty="0"/>
+                      <a:endParaRPr lang="en-US" sz="1800" dirty="0"/>
                     </a:p>
                   </a:txBody>
                   <a:tcPr marL="57254" marR="57254" marT="28627" marB="28627" anchor="ctr"/>
@@ -5268,10 +5647,10 @@
                     <a:lstStyle/>
                     <a:p>
                       <a:r>
-                        <a:rPr lang="ru-RU" sz="1400" b="1" dirty="0"/>
+                        <a:rPr lang="ru-RU" sz="1800" b="1" dirty="0"/>
                         <a:t>Угрозы</a:t>
                       </a:r>
-                      <a:endParaRPr lang="en-US" sz="1400" dirty="0"/>
+                      <a:endParaRPr lang="en-US" sz="1800" dirty="0"/>
                     </a:p>
                   </a:txBody>
                   <a:tcPr marL="57254" marR="57254" marT="28627" marB="28627" anchor="ctr"/>
@@ -5289,44 +5668,21 @@
                     <a:lstStyle/>
                     <a:p>
                       <a:r>
-                        <a:rPr lang="ru-RU" sz="1400"/>
+                        <a:rPr lang="ru-RU" sz="1800" dirty="0"/>
                         <a:t>Сезонный пик летом – каникулы + отпуска + ремонты</a:t>
                       </a:r>
                       <a:br>
-                        <a:rPr lang="ru-RU" sz="1400"/>
+                        <a:rPr lang="ru-RU" sz="1800" dirty="0"/>
                       </a:br>
                       <a:r>
-                        <a:rPr lang="ru-RU" sz="1400"/>
-                        <a:t>Партнёрство с УК – включить услугу в квитанцию ЖКХ</a:t>
-                      </a:r>
-                      <a:br>
-                        <a:rPr lang="ru-RU" sz="1400"/>
-                      </a:br>
-                      <a:r>
-                        <a:rPr lang="ru-RU" sz="1400"/>
-                        <a:t>Расширение линейки микрозадач (вынести сухую одежду, покормить кота и т.д.)</a:t>
-                      </a:r>
-                      <a:br>
-                        <a:rPr lang="ru-RU" sz="1400"/>
-                      </a:br>
-                      <a:r>
-                        <a:rPr lang="ru-RU" sz="1400"/>
-                        <a:t>Создание PWA/веб-версии как запасного канала при блокировке Telegram</a:t>
-                      </a:r>
-                      <a:br>
-                        <a:rPr lang="ru-RU" sz="1400"/>
-                      </a:br>
-                      <a:r>
-                        <a:rPr lang="ru-RU" sz="1400"/>
-                        <a:t>Выход в другие города-миллионники (низкая стоимость копирования модели)</a:t>
-                      </a:r>
-                      <a:br>
-                        <a:rPr lang="ru-RU" sz="1400"/>
-                      </a:br>
-                      <a:r>
-                        <a:rPr lang="ru-RU" sz="1400"/>
-                        <a:t>Интеграция с домовыми чатами и районными пабликами</a:t>
-                      </a:r>
+                        <a:rPr lang="ru-RU" sz="1800" dirty="0"/>
+                        <a:t>Интеграция с домовыми чатами и районными </a:t>
+                      </a:r>
+                      <a:r>
+                        <a:rPr lang="ru-RU" sz="1800" dirty="0" err="1"/>
+                        <a:t>пабликами</a:t>
+                      </a:r>
+                      <a:endParaRPr lang="ru-RU" sz="1800" dirty="0"/>
                     </a:p>
                   </a:txBody>
                   <a:tcPr marL="57254" marR="57254" marT="28627" marB="28627" anchor="ctr"/>
@@ -5337,58 +5693,21 @@
                     <a:lstStyle/>
                     <a:p>
                       <a:r>
-                        <a:rPr lang="ru-RU" sz="1400" dirty="0"/>
+                        <a:rPr lang="ru-RU" sz="1800" dirty="0"/>
                         <a:t>Юридические риски – претензии родителей или проверки детского труда</a:t>
                       </a:r>
                       <a:br>
-                        <a:rPr lang="ru-RU" sz="1400" dirty="0"/>
+                        <a:rPr lang="ru-RU" sz="1800" dirty="0"/>
                       </a:br>
                       <a:r>
-                        <a:rPr lang="ru-RU" sz="1400" dirty="0"/>
-                        <a:t>Блокировка </a:t>
-                      </a:r>
-                      <a:r>
-                        <a:rPr lang="ru-RU" sz="1400" dirty="0" err="1"/>
-                        <a:t>Telegram</a:t>
-                      </a:r>
-                      <a:r>
-                        <a:rPr lang="ru-RU" sz="1400" dirty="0"/>
-                        <a:t> в России – угроза доступности сервиса</a:t>
+                        <a:rPr lang="ru-RU" sz="1800" dirty="0"/>
+                        <a:t>Негативный инцидент (кража, потеря пакета) – удар по репутации</a:t>
                       </a:r>
                       <a:br>
-                        <a:rPr lang="ru-RU" sz="1400" dirty="0"/>
+                        <a:rPr lang="ru-RU" sz="1800" dirty="0"/>
                       </a:br>
                       <a:r>
-                        <a:rPr lang="ru-RU" sz="1400" dirty="0"/>
-                        <a:t>Негативный инцидент (кража, потеря пакета) – удар по репутации</a:t>
-                      </a:r>
-                      <a:br>
-                        <a:rPr lang="ru-RU" sz="1400" dirty="0"/>
-                      </a:br>
-                      <a:r>
-                        <a:rPr lang="ru-RU" sz="1400" dirty="0"/>
-                        <a:t>Появление конкурента с похожей моделью (школьники + </a:t>
-                      </a:r>
-                      <a:r>
-                        <a:rPr lang="ru-RU" sz="1400" dirty="0" err="1"/>
-                        <a:t>микрозаказы</a:t>
-                      </a:r>
-                      <a:r>
-                        <a:rPr lang="ru-RU" sz="1400" dirty="0"/>
-                        <a:t>)</a:t>
-                      </a:r>
-                      <a:br>
-                        <a:rPr lang="ru-RU" sz="1400" dirty="0"/>
-                      </a:br>
-                      <a:r>
-                        <a:rPr lang="ru-RU" sz="1400" dirty="0"/>
-                        <a:t>Низкий спрос при недостаточном маркетинге</a:t>
-                      </a:r>
-                      <a:br>
-                        <a:rPr lang="ru-RU" sz="1400" dirty="0"/>
-                      </a:br>
-                      <a:r>
-                        <a:rPr lang="ru-RU" sz="1400" dirty="0"/>
+                        <a:rPr lang="ru-RU" sz="1800" dirty="0"/>
                         <a:t>Сезонный спад осенью/зимой (школьники заняты учёбой)</a:t>
                       </a:r>
                     </a:p>
@@ -5418,7 +5737,7 @@
 </p:sld>
 </file>
 
-<file path=ppt/slides/slide7.xml><?xml version="1.0" encoding="utf-8"?>
+<file path=ppt/slides/slide8.xml><?xml version="1.0" encoding="utf-8"?>
 <p:sld xmlns:a="http://schemas.openxmlformats.org/drawingml/2006/main" xmlns:r="http://schemas.openxmlformats.org/officeDocument/2006/relationships" xmlns:p="http://schemas.openxmlformats.org/presentationml/2006/main">
   <p:cSld>
     <p:spTree>
@@ -5479,14 +5798,14 @@
             <p:ph idx="1"/>
             <p:extLst>
               <p:ext uri="{D42A27DB-BD31-4B8C-83A1-F6EECF244321}">
-                <p14:modId xmlns:p14="http://schemas.microsoft.com/office/powerpoint/2010/main" val="2543013327"/>
+                <p14:modId xmlns:p14="http://schemas.microsoft.com/office/powerpoint/2010/main" val="2430122147"/>
               </p:ext>
             </p:extLst>
           </p:nvPr>
         </p:nvGraphicFramePr>
         <p:xfrm>
           <a:off x="1035698" y="1505124"/>
-          <a:ext cx="10086390" cy="4199860"/>
+          <a:ext cx="10086390" cy="4749776"/>
         </p:xfrm>
         <a:graphic>
           <a:graphicData uri="http://schemas.openxmlformats.org/drawingml/2006/table">
@@ -5538,10 +5857,10 @@
                     <a:lstStyle/>
                     <a:p>
                       <a:r>
-                        <a:rPr lang="ru-RU" sz="1400" b="1"/>
+                        <a:rPr lang="ru-RU" sz="1600" b="1"/>
                         <a:t>Категория риска</a:t>
                       </a:r>
-                      <a:endParaRPr lang="ru-RU" sz="1400"/>
+                      <a:endParaRPr lang="ru-RU" sz="1600"/>
                     </a:p>
                   </a:txBody>
                   <a:tcPr marL="29204" marR="29204" marT="14602" marB="14602" anchor="ctr"/>
@@ -5552,10 +5871,10 @@
                     <a:lstStyle/>
                     <a:p>
                       <a:r>
-                        <a:rPr lang="ru-RU" sz="1400" b="1"/>
+                        <a:rPr lang="ru-RU" sz="1600" b="1"/>
                         <a:t>Описание риска</a:t>
                       </a:r>
-                      <a:endParaRPr lang="ru-RU" sz="1400"/>
+                      <a:endParaRPr lang="ru-RU" sz="1600"/>
                     </a:p>
                   </a:txBody>
                   <a:tcPr marL="29204" marR="29204" marT="14602" marB="14602" anchor="ctr"/>
@@ -5566,10 +5885,10 @@
                     <a:lstStyle/>
                     <a:p>
                       <a:r>
-                        <a:rPr lang="ru-RU" sz="1400" b="1"/>
+                        <a:rPr lang="ru-RU" sz="1600" b="1"/>
                         <a:t>Вероятность</a:t>
                       </a:r>
-                      <a:endParaRPr lang="ru-RU" sz="1400"/>
+                      <a:endParaRPr lang="ru-RU" sz="1600"/>
                     </a:p>
                   </a:txBody>
                   <a:tcPr marL="29204" marR="29204" marT="14602" marB="14602" anchor="ctr"/>
@@ -5580,10 +5899,10 @@
                     <a:lstStyle/>
                     <a:p>
                       <a:r>
-                        <a:rPr lang="ru-RU" sz="1400" b="1" dirty="0"/>
+                        <a:rPr lang="ru-RU" sz="1600" b="1" dirty="0"/>
                         <a:t>Влияние на бизнес</a:t>
                       </a:r>
-                      <a:endParaRPr lang="ru-RU" sz="1400" dirty="0"/>
+                      <a:endParaRPr lang="ru-RU" sz="1600" dirty="0"/>
                     </a:p>
                   </a:txBody>
                   <a:tcPr marL="29204" marR="29204" marT="14602" marB="14602" anchor="ctr"/>
@@ -5594,10 +5913,10 @@
                     <a:lstStyle/>
                     <a:p>
                       <a:r>
-                        <a:rPr lang="ru-RU" sz="1400" b="1"/>
+                        <a:rPr lang="ru-RU" sz="1600" b="1"/>
                         <a:t>Стратегия минимизации</a:t>
                       </a:r>
-                      <a:endParaRPr lang="ru-RU" sz="1400"/>
+                      <a:endParaRPr lang="ru-RU" sz="1600"/>
                     </a:p>
                   </a:txBody>
                   <a:tcPr marL="29204" marR="29204" marT="14602" marB="14602" anchor="ctr"/>
@@ -5615,10 +5934,10 @@
                     <a:lstStyle/>
                     <a:p>
                       <a:r>
-                        <a:rPr lang="ru-RU" sz="1400" b="1"/>
+                        <a:rPr lang="ru-RU" sz="1600" b="1"/>
                         <a:t>Юридический</a:t>
                       </a:r>
-                      <a:endParaRPr lang="ru-RU" sz="1400"/>
+                      <a:endParaRPr lang="ru-RU" sz="1600"/>
                     </a:p>
                   </a:txBody>
                   <a:tcPr marL="29204" marR="29204" marT="14602" marB="14602" anchor="ctr"/>
@@ -5629,7 +5948,7 @@
                     <a:lstStyle/>
                     <a:p>
                       <a:r>
-                        <a:rPr lang="ru-RU" sz="1400"/>
+                        <a:rPr lang="ru-RU" sz="1600" dirty="0"/>
                         <a:t>Претензии со стороны родителей школьников или регулирующих органов по поводу детского труда.</a:t>
                       </a:r>
                     </a:p>
@@ -5642,7 +5961,7 @@
                     <a:lstStyle/>
                     <a:p>
                       <a:r>
-                        <a:rPr lang="ru-RU" sz="1400"/>
+                        <a:rPr lang="ru-RU" sz="1600"/>
                         <a:t>Средняя</a:t>
                       </a:r>
                     </a:p>
@@ -5655,7 +5974,7 @@
                     <a:lstStyle/>
                     <a:p>
                       <a:r>
-                        <a:rPr lang="ru-RU" sz="1400"/>
+                        <a:rPr lang="ru-RU" sz="1600"/>
                         <a:t>Высокое (вплоть до блокировки)</a:t>
                       </a:r>
                     </a:p>
@@ -5668,7 +5987,7 @@
                     <a:lstStyle/>
                     <a:p>
                       <a:r>
-                        <a:rPr lang="ru-RU" sz="1400" b="0" dirty="0"/>
+                        <a:rPr lang="ru-RU" sz="1600" b="0" dirty="0"/>
                         <a:t>Добавить раздел в пользовательское соглашение с отказом от ответственности. </a:t>
                       </a:r>
                     </a:p>
@@ -5688,10 +6007,10 @@
                     <a:lstStyle/>
                     <a:p>
                       <a:r>
-                        <a:rPr lang="ru-RU" sz="1400" b="1"/>
+                        <a:rPr lang="ru-RU" sz="1600" b="1"/>
                         <a:t>Операционный</a:t>
                       </a:r>
-                      <a:endParaRPr lang="ru-RU" sz="1400"/>
+                      <a:endParaRPr lang="ru-RU" sz="1600"/>
                     </a:p>
                   </a:txBody>
                   <a:tcPr marL="29204" marR="29204" marT="14602" marB="14602" anchor="ctr"/>
@@ -5702,7 +6021,7 @@
                     <a:lstStyle/>
                     <a:p>
                       <a:r>
-                        <a:rPr lang="ru-RU" sz="1400"/>
+                        <a:rPr lang="ru-RU" sz="1600" dirty="0"/>
                         <a:t>Школьник не вышел на заказ или украл пакет с ценными вещами.</a:t>
                       </a:r>
                     </a:p>
@@ -5715,7 +6034,7 @@
                     <a:lstStyle/>
                     <a:p>
                       <a:r>
-                        <a:rPr lang="ru-RU" sz="1400"/>
+                        <a:rPr lang="ru-RU" sz="1600"/>
                         <a:t>Низкая</a:t>
                       </a:r>
                     </a:p>
@@ -5728,7 +6047,7 @@
                     <a:lstStyle/>
                     <a:p>
                       <a:r>
-                        <a:rPr lang="ru-RU" sz="1400"/>
+                        <a:rPr lang="ru-RU" sz="1600"/>
                         <a:t>Среднее (репутационные потери)</a:t>
                       </a:r>
                     </a:p>
@@ -5741,7 +6060,7 @@
                     <a:lstStyle/>
                     <a:p>
                       <a:r>
-                        <a:rPr lang="ru-RU" sz="1400" b="0" dirty="0"/>
+                        <a:rPr lang="ru-RU" sz="1600" b="0" dirty="0"/>
                         <a:t>Двойная система верификации. Внедрить рейтинг исполнителей.</a:t>
                       </a:r>
                     </a:p>
@@ -5754,17 +6073,17 @@
                   </a:ext>
                 </a:extLst>
               </a:tr>
-              <a:tr h="119748">
+              <a:tr h="1087929">
                 <a:tc>
                   <a:txBody>
                     <a:bodyPr/>
                     <a:lstStyle/>
                     <a:p>
                       <a:r>
-                        <a:rPr lang="ru-RU" sz="1400" b="1"/>
-                        <a:t>Технический</a:t>
-                      </a:r>
-                      <a:endParaRPr lang="ru-RU" sz="1400"/>
+                        <a:rPr lang="ru-RU" sz="1600" b="1" dirty="0"/>
+                        <a:t>Рыночный</a:t>
+                      </a:r>
+                      <a:endParaRPr lang="ru-RU" sz="1600" dirty="0"/>
                     </a:p>
                   </a:txBody>
                   <a:tcPr marL="29204" marR="29204" marT="14602" marB="14602" anchor="ctr"/>
@@ -5775,16 +6094,8 @@
                     <a:lstStyle/>
                     <a:p>
                       <a:r>
-                        <a:rPr lang="ru-RU" sz="1400" dirty="0"/>
-                        <a:t>Блокировка </a:t>
-                      </a:r>
-                      <a:r>
-                        <a:rPr lang="ru-RU" sz="1400" dirty="0" err="1"/>
-                        <a:t>Telegram</a:t>
-                      </a:r>
-                      <a:r>
-                        <a:rPr lang="ru-RU" sz="1400" dirty="0"/>
-                        <a:t> в России и сложности с хостингом.</a:t>
+                        <a:rPr lang="ru-RU" sz="1600"/>
+                        <a:t>Отсутствие спроса или появление сильного конкурента с таким же УТП.</a:t>
                       </a:r>
                     </a:p>
                   </a:txBody>
@@ -5796,8 +6107,8 @@
                     <a:lstStyle/>
                     <a:p>
                       <a:r>
-                        <a:rPr lang="ru-RU" sz="1400" dirty="0"/>
-                        <a:t>Высокая (уже)</a:t>
+                        <a:rPr lang="ru-RU" sz="1600" dirty="0"/>
+                        <a:t>Низкая</a:t>
                       </a:r>
                     </a:p>
                   </a:txBody>
@@ -5809,8 +6120,8 @@
                     <a:lstStyle/>
                     <a:p>
                       <a:r>
-                        <a:rPr lang="ru-RU" sz="1400"/>
-                        <a:t>Высокое (сервис станет недоступен)</a:t>
+                        <a:rPr lang="ru-RU" sz="1600" dirty="0"/>
+                        <a:t>Среднее</a:t>
                       </a:r>
                     </a:p>
                   </a:txBody>
@@ -5822,93 +6133,7 @@
                     <a:lstStyle/>
                     <a:p>
                       <a:r>
-                        <a:rPr lang="ru-RU" sz="1400" dirty="0"/>
-                        <a:t>Использование </a:t>
-                      </a:r>
-                      <a:r>
-                        <a:rPr lang="en-US" sz="1400" dirty="0"/>
-                        <a:t>VPN</a:t>
-                      </a:r>
-                      <a:r>
-                        <a:rPr lang="ru-RU" sz="1400" dirty="0"/>
-                        <a:t> для хостинга</a:t>
-                      </a:r>
-                      <a:r>
-                        <a:rPr lang="en-US" sz="1400" dirty="0"/>
-                        <a:t> </a:t>
-                      </a:r>
-                      <a:endParaRPr lang="ru-RU" sz="1400" dirty="0"/>
-                    </a:p>
-                  </a:txBody>
-                  <a:tcPr marL="29204" marR="29204" marT="14602" marB="14602" anchor="ctr"/>
-                </a:tc>
-                <a:extLst>
-                  <a:ext uri="{0D108BD9-81ED-4DB2-BD59-A6C34878D82A}">
-                    <a16:rowId xmlns:a16="http://schemas.microsoft.com/office/drawing/2014/main" val="592635430"/>
-                  </a:ext>
-                </a:extLst>
-              </a:tr>
-              <a:tr h="1087929">
-                <a:tc>
-                  <a:txBody>
-                    <a:bodyPr/>
-                    <a:lstStyle/>
-                    <a:p>
-                      <a:r>
-                        <a:rPr lang="ru-RU" sz="1400" b="1"/>
-                        <a:t>Рыночный</a:t>
-                      </a:r>
-                      <a:endParaRPr lang="ru-RU" sz="1400"/>
-                    </a:p>
-                  </a:txBody>
-                  <a:tcPr marL="29204" marR="29204" marT="14602" marB="14602" anchor="ctr"/>
-                </a:tc>
-                <a:tc>
-                  <a:txBody>
-                    <a:bodyPr/>
-                    <a:lstStyle/>
-                    <a:p>
-                      <a:r>
-                        <a:rPr lang="ru-RU" sz="1400"/>
-                        <a:t>Отсутствие спроса или появление сильного конкурента с таким же УТП.</a:t>
-                      </a:r>
-                    </a:p>
-                  </a:txBody>
-                  <a:tcPr marL="29204" marR="29204" marT="14602" marB="14602" anchor="ctr"/>
-                </a:tc>
-                <a:tc>
-                  <a:txBody>
-                    <a:bodyPr/>
-                    <a:lstStyle/>
-                    <a:p>
-                      <a:r>
-                        <a:rPr lang="ru-RU" sz="1400" dirty="0"/>
-                        <a:t>Низкая</a:t>
-                      </a:r>
-                    </a:p>
-                  </a:txBody>
-                  <a:tcPr marL="29204" marR="29204" marT="14602" marB="14602" anchor="ctr"/>
-                </a:tc>
-                <a:tc>
-                  <a:txBody>
-                    <a:bodyPr/>
-                    <a:lstStyle/>
-                    <a:p>
-                      <a:r>
-                        <a:rPr lang="ru-RU" sz="1400" dirty="0"/>
-                        <a:t>Среднее</a:t>
-                      </a:r>
-                    </a:p>
-                  </a:txBody>
-                  <a:tcPr marL="29204" marR="29204" marT="14602" marB="14602" anchor="ctr"/>
-                </a:tc>
-                <a:tc>
-                  <a:txBody>
-                    <a:bodyPr/>
-                    <a:lstStyle/>
-                    <a:p>
-                      <a:r>
-                        <a:rPr lang="ru-RU" sz="1400" dirty="0"/>
+                        <a:rPr lang="ru-RU" sz="1600" dirty="0"/>
                         <a:t>начать с 2-3 густонаселённых спальных районов, стать там монополистом, прежде чем расширяться.</a:t>
                       </a:r>
                     </a:p>
@@ -5938,7 +6163,7 @@
 </p:sld>
 </file>
 
-<file path=ppt/slides/slide8.xml><?xml version="1.0" encoding="utf-8"?>
+<file path=ppt/slides/slide9.xml><?xml version="1.0" encoding="utf-8"?>
 <p:sld xmlns:a="http://schemas.openxmlformats.org/drawingml/2006/main" xmlns:r="http://schemas.openxmlformats.org/officeDocument/2006/relationships" xmlns:p="http://schemas.openxmlformats.org/presentationml/2006/main">
   <p:cSld>
     <p:spTree>

--- a/TrashOut – Проект Константина Евстигнеева.pptx
+++ b/TrashOut – Проект Константина Евстигнеева.pptx
@@ -10,10 +10,11 @@
     <p:sldId id="257" r:id="rId4"/>
     <p:sldId id="258" r:id="rId5"/>
     <p:sldId id="259" r:id="rId6"/>
-    <p:sldId id="263" r:id="rId7"/>
-    <p:sldId id="264" r:id="rId8"/>
-    <p:sldId id="262" r:id="rId9"/>
-    <p:sldId id="261" r:id="rId10"/>
+    <p:sldId id="266" r:id="rId7"/>
+    <p:sldId id="263" r:id="rId8"/>
+    <p:sldId id="264" r:id="rId9"/>
+    <p:sldId id="262" r:id="rId10"/>
+    <p:sldId id="261" r:id="rId11"/>
   </p:sldIdLst>
   <p:sldSz cx="12192000" cy="6858000"/>
   <p:notesSz cx="6858000" cy="9144000"/>
@@ -4205,6 +4206,74 @@
 </p:sld>
 </file>
 
+<file path=ppt/slides/slide10.xml><?xml version="1.0" encoding="utf-8"?>
+<p:sld xmlns:a="http://schemas.openxmlformats.org/drawingml/2006/main" xmlns:r="http://schemas.openxmlformats.org/officeDocument/2006/relationships" xmlns:p="http://schemas.openxmlformats.org/presentationml/2006/main">
+  <p:cSld>
+    <p:spTree>
+      <p:nvGrpSpPr>
+        <p:cNvPr id="1" name=""/>
+        <p:cNvGrpSpPr/>
+        <p:nvPr/>
+      </p:nvGrpSpPr>
+      <p:grpSpPr>
+        <a:xfrm>
+          <a:off x="0" y="0"/>
+          <a:ext cx="0" cy="0"/>
+          <a:chOff x="0" y="0"/>
+          <a:chExt cx="0" cy="0"/>
+        </a:xfrm>
+      </p:grpSpPr>
+      <p:sp>
+        <p:nvSpPr>
+          <p:cNvPr id="3" name="Объект 2">
+            <a:extLst>
+              <a:ext uri="{FF2B5EF4-FFF2-40B4-BE49-F238E27FC236}">
+                <a16:creationId xmlns:a16="http://schemas.microsoft.com/office/drawing/2014/main" id="{7342DC8B-EE67-6434-593A-ED4326253C03}"/>
+              </a:ext>
+            </a:extLst>
+          </p:cNvPr>
+          <p:cNvSpPr>
+            <a:spLocks noGrp="1"/>
+          </p:cNvSpPr>
+          <p:nvPr>
+            <p:ph idx="1"/>
+          </p:nvPr>
+        </p:nvSpPr>
+        <p:spPr>
+          <a:xfrm>
+            <a:off x="1082350" y="1825625"/>
+            <a:ext cx="10571583" cy="4351338"/>
+          </a:xfrm>
+        </p:spPr>
+        <p:txBody>
+          <a:bodyPr>
+            <a:normAutofit/>
+          </a:bodyPr>
+          <a:lstStyle/>
+          <a:p>
+            <a:pPr marL="0" indent="0">
+              <a:buNone/>
+            </a:pPr>
+            <a:r>
+              <a:rPr lang="ru-RU" sz="6600" dirty="0"/>
+              <a:t>СПАСИБО ЗА ВНИМАНИЕ</a:t>
+            </a:r>
+          </a:p>
+        </p:txBody>
+      </p:sp>
+    </p:spTree>
+    <p:extLst>
+      <p:ext uri="{BB962C8B-B14F-4D97-AF65-F5344CB8AC3E}">
+        <p14:creationId xmlns:p14="http://schemas.microsoft.com/office/powerpoint/2010/main" val="216710015"/>
+      </p:ext>
+    </p:extLst>
+  </p:cSld>
+  <p:clrMapOvr>
+    <a:masterClrMapping/>
+  </p:clrMapOvr>
+</p:sld>
+</file>
+
 <file path=ppt/slides/slide2.xml><?xml version="1.0" encoding="utf-8"?>
 <p:sld xmlns:a="http://schemas.openxmlformats.org/drawingml/2006/main" xmlns:r="http://schemas.openxmlformats.org/officeDocument/2006/relationships" xmlns:p="http://schemas.openxmlformats.org/presentationml/2006/main">
   <p:cSld>
@@ -4813,6 +4882,127 @@
 </file>
 
 <file path=ppt/slides/slide6.xml><?xml version="1.0" encoding="utf-8"?>
+<p:sld xmlns:a="http://schemas.openxmlformats.org/drawingml/2006/main" xmlns:r="http://schemas.openxmlformats.org/officeDocument/2006/relationships" xmlns:p="http://schemas.openxmlformats.org/presentationml/2006/main">
+  <p:cSld>
+    <p:spTree>
+      <p:nvGrpSpPr>
+        <p:cNvPr id="1" name=""/>
+        <p:cNvGrpSpPr/>
+        <p:nvPr/>
+      </p:nvGrpSpPr>
+      <p:grpSpPr>
+        <a:xfrm>
+          <a:off x="0" y="0"/>
+          <a:ext cx="0" cy="0"/>
+          <a:chOff x="0" y="0"/>
+          <a:chExt cx="0" cy="0"/>
+        </a:xfrm>
+      </p:grpSpPr>
+      <p:sp>
+        <p:nvSpPr>
+          <p:cNvPr id="2" name="Заголовок 1">
+            <a:extLst>
+              <a:ext uri="{FF2B5EF4-FFF2-40B4-BE49-F238E27FC236}">
+                <a16:creationId xmlns:a16="http://schemas.microsoft.com/office/drawing/2014/main" id="{F690D8F9-63A8-40B8-0EA2-2CB5C89B5A0A}"/>
+              </a:ext>
+            </a:extLst>
+          </p:cNvPr>
+          <p:cNvSpPr>
+            <a:spLocks noGrp="1"/>
+          </p:cNvSpPr>
+          <p:nvPr>
+            <p:ph type="title"/>
+          </p:nvPr>
+        </p:nvSpPr>
+        <p:spPr/>
+        <p:txBody>
+          <a:bodyPr/>
+          <a:lstStyle/>
+          <a:p>
+            <a:r>
+              <a:rPr lang="ru-RU" dirty="0"/>
+              <a:t>Функция ИБ </a:t>
+            </a:r>
+          </a:p>
+        </p:txBody>
+      </p:sp>
+      <p:sp>
+        <p:nvSpPr>
+          <p:cNvPr id="3" name="Объект 2">
+            <a:extLst>
+              <a:ext uri="{FF2B5EF4-FFF2-40B4-BE49-F238E27FC236}">
+                <a16:creationId xmlns:a16="http://schemas.microsoft.com/office/drawing/2014/main" id="{C1489931-5355-6A6B-AC72-8521DEF5F509}"/>
+              </a:ext>
+            </a:extLst>
+          </p:cNvPr>
+          <p:cNvSpPr>
+            <a:spLocks noGrp="1"/>
+          </p:cNvSpPr>
+          <p:nvPr>
+            <p:ph idx="1"/>
+          </p:nvPr>
+        </p:nvSpPr>
+        <p:spPr>
+          <a:xfrm>
+            <a:off x="838200" y="1825625"/>
+            <a:ext cx="6840894" cy="4351338"/>
+          </a:xfrm>
+        </p:spPr>
+        <p:txBody>
+          <a:bodyPr>
+            <a:normAutofit/>
+          </a:bodyPr>
+          <a:lstStyle/>
+          <a:p>
+            <a:pPr marL="0" indent="0">
+              <a:buNone/>
+            </a:pPr>
+            <a:r>
+              <a:rPr lang="ru-RU" dirty="0"/>
+              <a:t>Мой проект полностью соответствует ФЗ-152, то есть:</a:t>
+            </a:r>
+          </a:p>
+          <a:p>
+            <a:pPr>
+              <a:buFontTx/>
+              <a:buChar char="-"/>
+            </a:pPr>
+            <a:r>
+              <a:rPr lang="ru-RU" dirty="0"/>
+              <a:t>Шифрование данных пользователя шифром «Магма»</a:t>
+            </a:r>
+          </a:p>
+          <a:p>
+            <a:pPr>
+              <a:buFontTx/>
+              <a:buChar char="-"/>
+            </a:pPr>
+            <a:r>
+              <a:rPr lang="ru-RU" dirty="0"/>
+              <a:t>Баннер с согласием на использование </a:t>
+            </a:r>
+            <a:r>
+              <a:rPr lang="ru-RU" dirty="0" err="1"/>
+              <a:t>пдн</a:t>
+            </a:r>
+            <a:endParaRPr lang="ru-RU" dirty="0"/>
+          </a:p>
+        </p:txBody>
+      </p:sp>
+    </p:spTree>
+    <p:extLst>
+      <p:ext uri="{BB962C8B-B14F-4D97-AF65-F5344CB8AC3E}">
+        <p14:creationId xmlns:p14="http://schemas.microsoft.com/office/powerpoint/2010/main" val="1590008760"/>
+      </p:ext>
+    </p:extLst>
+  </p:cSld>
+  <p:clrMapOvr>
+    <a:masterClrMapping/>
+  </p:clrMapOvr>
+</p:sld>
+</file>
+
+<file path=ppt/slides/slide7.xml><?xml version="1.0" encoding="utf-8"?>
 <p:sld xmlns:a="http://schemas.openxmlformats.org/drawingml/2006/main" xmlns:r="http://schemas.openxmlformats.org/officeDocument/2006/relationships" xmlns:p="http://schemas.openxmlformats.org/presentationml/2006/main">
   <p:cSld>
     <p:spTree>
@@ -5412,7 +5602,7 @@
 </p:sld>
 </file>
 
-<file path=ppt/slides/slide7.xml><?xml version="1.0" encoding="utf-8"?>
+<file path=ppt/slides/slide8.xml><?xml version="1.0" encoding="utf-8"?>
 <p:sld xmlns:a="http://schemas.openxmlformats.org/drawingml/2006/main" xmlns:r="http://schemas.openxmlformats.org/officeDocument/2006/relationships" xmlns:p="http://schemas.openxmlformats.org/presentationml/2006/main">
   <p:cSld>
     <p:spTree>
@@ -5737,7 +5927,7 @@
 </p:sld>
 </file>
 
-<file path=ppt/slides/slide8.xml><?xml version="1.0" encoding="utf-8"?>
+<file path=ppt/slides/slide9.xml><?xml version="1.0" encoding="utf-8"?>
 <p:sld xmlns:a="http://schemas.openxmlformats.org/drawingml/2006/main" xmlns:r="http://schemas.openxmlformats.org/officeDocument/2006/relationships" xmlns:p="http://schemas.openxmlformats.org/presentationml/2006/main">
   <p:cSld>
     <p:spTree>
@@ -6154,74 +6344,6 @@
     <p:extLst>
       <p:ext uri="{BB962C8B-B14F-4D97-AF65-F5344CB8AC3E}">
         <p14:creationId xmlns:p14="http://schemas.microsoft.com/office/powerpoint/2010/main" val="2281160985"/>
-      </p:ext>
-    </p:extLst>
-  </p:cSld>
-  <p:clrMapOvr>
-    <a:masterClrMapping/>
-  </p:clrMapOvr>
-</p:sld>
-</file>
-
-<file path=ppt/slides/slide9.xml><?xml version="1.0" encoding="utf-8"?>
-<p:sld xmlns:a="http://schemas.openxmlformats.org/drawingml/2006/main" xmlns:r="http://schemas.openxmlformats.org/officeDocument/2006/relationships" xmlns:p="http://schemas.openxmlformats.org/presentationml/2006/main">
-  <p:cSld>
-    <p:spTree>
-      <p:nvGrpSpPr>
-        <p:cNvPr id="1" name=""/>
-        <p:cNvGrpSpPr/>
-        <p:nvPr/>
-      </p:nvGrpSpPr>
-      <p:grpSpPr>
-        <a:xfrm>
-          <a:off x="0" y="0"/>
-          <a:ext cx="0" cy="0"/>
-          <a:chOff x="0" y="0"/>
-          <a:chExt cx="0" cy="0"/>
-        </a:xfrm>
-      </p:grpSpPr>
-      <p:sp>
-        <p:nvSpPr>
-          <p:cNvPr id="3" name="Объект 2">
-            <a:extLst>
-              <a:ext uri="{FF2B5EF4-FFF2-40B4-BE49-F238E27FC236}">
-                <a16:creationId xmlns:a16="http://schemas.microsoft.com/office/drawing/2014/main" id="{7342DC8B-EE67-6434-593A-ED4326253C03}"/>
-              </a:ext>
-            </a:extLst>
-          </p:cNvPr>
-          <p:cNvSpPr>
-            <a:spLocks noGrp="1"/>
-          </p:cNvSpPr>
-          <p:nvPr>
-            <p:ph idx="1"/>
-          </p:nvPr>
-        </p:nvSpPr>
-        <p:spPr>
-          <a:xfrm>
-            <a:off x="1082350" y="1825625"/>
-            <a:ext cx="10571583" cy="4351338"/>
-          </a:xfrm>
-        </p:spPr>
-        <p:txBody>
-          <a:bodyPr>
-            <a:normAutofit/>
-          </a:bodyPr>
-          <a:lstStyle/>
-          <a:p>
-            <a:pPr marL="0" indent="0">
-              <a:buNone/>
-            </a:pPr>
-            <a:r>
-              <a:rPr lang="ru-RU" sz="6600" dirty="0"/>
-              <a:t>СПАСИБО ЗА ВНИМАНИЕ</a:t>
-            </a:r>
-          </a:p>
-        </p:txBody>
-      </p:sp>
-    </p:spTree>
-    <p:extLst>
-      <p:ext uri="{BB962C8B-B14F-4D97-AF65-F5344CB8AC3E}">
-        <p14:creationId xmlns:p14="http://schemas.microsoft.com/office/powerpoint/2010/main" val="216710015"/>
       </p:ext>
     </p:extLst>
   </p:cSld>
